--- a/unidad 1/1.3 Ejercicio Diagrama Uml_Cynthia Jasmine Morales Torres.pptx
+++ b/unidad 1/1.3 Ejercicio Diagrama Uml_Cynthia Jasmine Morales Torres.pptx
@@ -11,8 +11,9 @@
     <p:sldId id="261" r:id="rId5"/>
     <p:sldId id="262" r:id="rId6"/>
     <p:sldId id="258" r:id="rId7"/>
-    <p:sldId id="259" r:id="rId8"/>
-    <p:sldId id="263" r:id="rId9"/>
+    <p:sldId id="264" r:id="rId8"/>
+    <p:sldId id="259" r:id="rId9"/>
+    <p:sldId id="263" r:id="rId10"/>
   </p:sldIdLst>
   <p:sldSz cx="12192000" cy="6858000"/>
   <p:notesSz cx="6858000" cy="9144000"/>
@@ -111,6 +112,11 @@
       </a:defRPr>
     </a:lvl9pPr>
   </p:defaultTextStyle>
+  <p:extLst>
+    <p:ext uri="{EFAFB233-063F-42B5-8137-9DF3F51BA10A}">
+      <p15:sldGuideLst xmlns:p15="http://schemas.microsoft.com/office/powerpoint/2012/main"/>
+    </p:ext>
+  </p:extLst>
 </p:presentation>
 </file>
 
@@ -6895,6 +6901,41 @@
           </a:prstGeom>
         </p:spPr>
       </p:pic>
+      <p:sp>
+        <p:nvSpPr>
+          <p:cNvPr id="2" name="CuadroTexto 1">
+            <a:extLst>
+              <a:ext uri="{FF2B5EF4-FFF2-40B4-BE49-F238E27FC236}">
+                <a16:creationId xmlns:a16="http://schemas.microsoft.com/office/drawing/2014/main" id="{F6FF9C05-555E-0F7F-0B71-8A0252CB4E9F}"/>
+              </a:ext>
+            </a:extLst>
+          </p:cNvPr>
+          <p:cNvSpPr txBox="1"/>
+          <p:nvPr/>
+        </p:nvSpPr>
+        <p:spPr>
+          <a:xfrm>
+            <a:off x="4982966" y="205483"/>
+            <a:ext cx="4417888" cy="646331"/>
+          </a:xfrm>
+          <a:prstGeom prst="rect">
+            <a:avLst/>
+          </a:prstGeom>
+          <a:noFill/>
+        </p:spPr>
+        <p:txBody>
+          <a:bodyPr wrap="square" rtlCol="0">
+            <a:spAutoFit/>
+          </a:bodyPr>
+          <a:lstStyle/>
+          <a:p>
+            <a:r>
+              <a:rPr lang="es-MX" dirty="0"/>
+              <a:t>Comenzamos con nuestro primer diagrama UML</a:t>
+            </a:r>
+          </a:p>
+        </p:txBody>
+      </p:sp>
     </p:spTree>
     <p:extLst>
       <p:ext uri="{BB962C8B-B14F-4D97-AF65-F5344CB8AC3E}">
@@ -7287,7 +7328,7 @@
           <p:cNvPr id="2" name="Título 1">
             <a:extLst>
               <a:ext uri="{FF2B5EF4-FFF2-40B4-BE49-F238E27FC236}">
-                <a16:creationId xmlns:a16="http://schemas.microsoft.com/office/drawing/2014/main" id="{7105D634-59E8-381C-A5B7-D8F71D659552}"/>
+                <a16:creationId xmlns:a16="http://schemas.microsoft.com/office/drawing/2014/main" id="{F3DE34CD-9F2E-ADA7-F6F9-6EA0F920F8D9}"/>
               </a:ext>
             </a:extLst>
           </p:cNvPr>
@@ -7305,46 +7346,44 @@
           <a:p>
             <a:r>
               <a:rPr lang="es-MX" dirty="0"/>
-              <a:t>Conclusión </a:t>
-            </a:r>
-          </a:p>
-        </p:txBody>
-      </p:sp>
-      <p:sp>
-        <p:nvSpPr>
-          <p:cNvPr id="3" name="Marcador de contenido 2">
+              <a:t>Segundo diagrama</a:t>
+            </a:r>
+          </a:p>
+        </p:txBody>
+      </p:sp>
+      <p:pic>
+        <p:nvPicPr>
+          <p:cNvPr id="5" name="Marcador de contenido 4">
             <a:extLst>
               <a:ext uri="{FF2B5EF4-FFF2-40B4-BE49-F238E27FC236}">
-                <a16:creationId xmlns:a16="http://schemas.microsoft.com/office/drawing/2014/main" id="{60DE4E72-0024-C1BC-C0FC-5DA68682D8C8}"/>
+                <a16:creationId xmlns:a16="http://schemas.microsoft.com/office/drawing/2014/main" id="{2961B0EA-82DC-6F76-65E5-D692C375CC64}"/>
               </a:ext>
             </a:extLst>
           </p:cNvPr>
-          <p:cNvSpPr>
-            <a:spLocks noGrp="1"/>
-          </p:cNvSpPr>
+          <p:cNvPicPr>
+            <a:picLocks noGrp="1" noChangeAspect="1"/>
+          </p:cNvPicPr>
           <p:nvPr>
             <p:ph idx="1"/>
           </p:nvPr>
-        </p:nvSpPr>
-        <p:spPr/>
-        <p:txBody>
-          <a:bodyPr/>
-          <a:lstStyle/>
-          <a:p>
-            <a:pPr marL="0" indent="0" algn="just">
-              <a:buNone/>
-            </a:pPr>
-            <a:r>
-              <a:rPr lang="es-MX" dirty="0"/>
-              <a:t>El diagrama UML permite entender de forma clara la organización y funcionamiento del sistema biométrico de asistencia. Gracias a la separación de responsabilidades por clases y sus relaciones, se obtiene un diseño ordenado, seguro y fácil de implementar, que cubre autenticación, registro y gestión de información.</a:t>
-            </a:r>
-          </a:p>
-        </p:txBody>
-      </p:sp>
+        </p:nvPicPr>
+        <p:blipFill>
+          <a:blip r:embed="rId2"/>
+          <a:stretch>
+            <a:fillRect/>
+          </a:stretch>
+        </p:blipFill>
+        <p:spPr>
+          <a:xfrm>
+            <a:off x="1017090" y="1270000"/>
+            <a:ext cx="4234431" cy="5144834"/>
+          </a:xfrm>
+        </p:spPr>
+      </p:pic>
     </p:spTree>
     <p:extLst>
       <p:ext uri="{BB962C8B-B14F-4D97-AF65-F5344CB8AC3E}">
-        <p14:creationId xmlns:p14="http://schemas.microsoft.com/office/powerpoint/2010/main" val="1523644883"/>
+        <p14:creationId xmlns:p14="http://schemas.microsoft.com/office/powerpoint/2010/main" val="1367906496"/>
       </p:ext>
     </p:extLst>
   </p:cSld>
@@ -7376,6 +7415,95 @@
           <p:cNvPr id="2" name="Título 1">
             <a:extLst>
               <a:ext uri="{FF2B5EF4-FFF2-40B4-BE49-F238E27FC236}">
+                <a16:creationId xmlns:a16="http://schemas.microsoft.com/office/drawing/2014/main" id="{7105D634-59E8-381C-A5B7-D8F71D659552}"/>
+              </a:ext>
+            </a:extLst>
+          </p:cNvPr>
+          <p:cNvSpPr>
+            <a:spLocks noGrp="1"/>
+          </p:cNvSpPr>
+          <p:nvPr>
+            <p:ph type="title"/>
+          </p:nvPr>
+        </p:nvSpPr>
+        <p:spPr/>
+        <p:txBody>
+          <a:bodyPr/>
+          <a:lstStyle/>
+          <a:p>
+            <a:r>
+              <a:rPr lang="es-MX" dirty="0"/>
+              <a:t>Conclusión </a:t>
+            </a:r>
+          </a:p>
+        </p:txBody>
+      </p:sp>
+      <p:sp>
+        <p:nvSpPr>
+          <p:cNvPr id="3" name="Marcador de contenido 2">
+            <a:extLst>
+              <a:ext uri="{FF2B5EF4-FFF2-40B4-BE49-F238E27FC236}">
+                <a16:creationId xmlns:a16="http://schemas.microsoft.com/office/drawing/2014/main" id="{60DE4E72-0024-C1BC-C0FC-5DA68682D8C8}"/>
+              </a:ext>
+            </a:extLst>
+          </p:cNvPr>
+          <p:cNvSpPr>
+            <a:spLocks noGrp="1"/>
+          </p:cNvSpPr>
+          <p:nvPr>
+            <p:ph idx="1"/>
+          </p:nvPr>
+        </p:nvSpPr>
+        <p:spPr/>
+        <p:txBody>
+          <a:bodyPr/>
+          <a:lstStyle/>
+          <a:p>
+            <a:pPr marL="0" indent="0" algn="just">
+              <a:buNone/>
+            </a:pPr>
+            <a:r>
+              <a:rPr lang="es-MX" dirty="0"/>
+              <a:t>El diagrama UML permite entender de forma clara la organización y funcionamiento del sistema biométrico de asistencia. Gracias a la separación de responsabilidades por clases y sus relaciones, se obtiene un diseño ordenado, seguro y fácil de implementar, que cubre autenticación, registro y gestión de información.</a:t>
+            </a:r>
+          </a:p>
+        </p:txBody>
+      </p:sp>
+    </p:spTree>
+    <p:extLst>
+      <p:ext uri="{BB962C8B-B14F-4D97-AF65-F5344CB8AC3E}">
+        <p14:creationId xmlns:p14="http://schemas.microsoft.com/office/powerpoint/2010/main" val="1523644883"/>
+      </p:ext>
+    </p:extLst>
+  </p:cSld>
+  <p:clrMapOvr>
+    <a:masterClrMapping/>
+  </p:clrMapOvr>
+</p:sld>
+</file>
+
+<file path=ppt/slides/slide9.xml><?xml version="1.0" encoding="utf-8"?>
+<p:sld xmlns:a="http://schemas.openxmlformats.org/drawingml/2006/main" xmlns:r="http://schemas.openxmlformats.org/officeDocument/2006/relationships" xmlns:p="http://schemas.openxmlformats.org/presentationml/2006/main">
+  <p:cSld>
+    <p:spTree>
+      <p:nvGrpSpPr>
+        <p:cNvPr id="1" name=""/>
+        <p:cNvGrpSpPr/>
+        <p:nvPr/>
+      </p:nvGrpSpPr>
+      <p:grpSpPr>
+        <a:xfrm>
+          <a:off x="0" y="0"/>
+          <a:ext cx="0" cy="0"/>
+          <a:chOff x="0" y="0"/>
+          <a:chExt cx="0" cy="0"/>
+        </a:xfrm>
+      </p:grpSpPr>
+      <p:sp>
+        <p:nvSpPr>
+          <p:cNvPr id="2" name="Título 1">
+            <a:extLst>
+              <a:ext uri="{FF2B5EF4-FFF2-40B4-BE49-F238E27FC236}">
                 <a16:creationId xmlns:a16="http://schemas.microsoft.com/office/drawing/2014/main" id="{775EB4DD-C0CC-879D-B612-695F499DF281}"/>
               </a:ext>
             </a:extLst>
@@ -7415,12 +7543,26 @@
             <p:ph idx="1"/>
           </p:nvPr>
         </p:nvSpPr>
-        <p:spPr/>
+        <p:spPr>
+          <a:xfrm>
+            <a:off x="677334" y="2160589"/>
+            <a:ext cx="8596668" cy="962755"/>
+          </a:xfrm>
+        </p:spPr>
         <p:txBody>
           <a:bodyPr/>
           <a:lstStyle/>
           <a:p>
-            <a:endParaRPr lang="es-MX"/>
+            <a:pPr marL="0" indent="0">
+              <a:buNone/>
+            </a:pPr>
+            <a:r>
+              <a:rPr lang="es-MX" dirty="0">
+                <a:hlinkClick r:id="rId2"/>
+              </a:rPr>
+              <a:t>https://github.com/Cynthia21Morales/Ingenieria_del_Software_CynthiaJasmineMT/blob/main/unidad%201/1.3%20Ejercicio%20Diagrama%20Uml_Cynthia%20Jasmine%20Morales%20Torres.pptx</a:t>
+            </a:r>
+            <a:endParaRPr lang="es-MX" dirty="0"/>
           </a:p>
         </p:txBody>
       </p:sp>

--- a/unidad 1/1.3 Ejercicio Diagrama Uml_Cynthia Jasmine Morales Torres.pptx
+++ b/unidad 1/1.3 Ejercicio Diagrama Uml_Cynthia Jasmine Morales Torres.pptx
@@ -7,13 +7,14 @@
   <p:sldIdLst>
     <p:sldId id="256" r:id="rId2"/>
     <p:sldId id="257" r:id="rId3"/>
-    <p:sldId id="260" r:id="rId4"/>
-    <p:sldId id="261" r:id="rId5"/>
-    <p:sldId id="262" r:id="rId6"/>
-    <p:sldId id="258" r:id="rId7"/>
-    <p:sldId id="264" r:id="rId8"/>
-    <p:sldId id="259" r:id="rId9"/>
-    <p:sldId id="263" r:id="rId10"/>
+    <p:sldId id="265" r:id="rId4"/>
+    <p:sldId id="260" r:id="rId5"/>
+    <p:sldId id="261" r:id="rId6"/>
+    <p:sldId id="262" r:id="rId7"/>
+    <p:sldId id="258" r:id="rId8"/>
+    <p:sldId id="264" r:id="rId9"/>
+    <p:sldId id="259" r:id="rId10"/>
+    <p:sldId id="263" r:id="rId11"/>
   </p:sldIdLst>
   <p:sldSz cx="12192000" cy="6858000"/>
   <p:notesSz cx="6858000" cy="9144000"/>
@@ -5851,8 +5852,8 @@
         </p:nvSpPr>
         <p:spPr>
           <a:xfrm>
-            <a:off x="2513583" y="2414712"/>
-            <a:ext cx="7164833" cy="4431983"/>
+            <a:off x="6095998" y="2241273"/>
+            <a:ext cx="3963221" cy="3024611"/>
           </a:xfrm>
           <a:prstGeom prst="rect">
             <a:avLst/>
@@ -5864,532 +5865,250 @@
           </a:bodyPr>
           <a:lstStyle/>
           <a:p>
-            <a:pPr algn="ctr"/>
-            <a:r>
-              <a:rPr lang="en-US" sz="1600" dirty="0">
-                <a:solidFill>
-                  <a:srgbClr val="000000"/>
-                </a:solidFill>
+            <a:pPr algn="ctr">
+              <a:lnSpc>
+                <a:spcPct val="107000"/>
+              </a:lnSpc>
+              <a:spcAft>
+                <a:spcPts val="800"/>
+              </a:spcAft>
+            </a:pPr>
+            <a:r>
+              <a:rPr lang="es-MX" sz="1500" b="1" dirty="0">
+                <a:effectLst/>
                 <a:latin typeface="Century Gothic" panose="020B0502020202020204" pitchFamily="34" charset="0"/>
-                <a:ea typeface="Glacial Indifference"/>
-                <a:cs typeface="Glacial Indifference"/>
-                <a:sym typeface="Glacial Indifference"/>
+                <a:ea typeface="Calibri" panose="020F0502020204030204" pitchFamily="34" charset="0"/>
+                <a:cs typeface="Arial" panose="020B0604020202020204" pitchFamily="34" charset="0"/>
               </a:rPr>
-              <a:t>Materia:</a:t>
-            </a:r>
-          </a:p>
-          <a:p>
-            <a:pPr algn="ctr"/>
-            <a:r>
-              <a:rPr lang="en-US" sz="1600" dirty="0">
-                <a:solidFill>
-                  <a:srgbClr val="000000"/>
-                </a:solidFill>
+              <a:t>Integrantes del proyecto:</a:t>
+            </a:r>
+            <a:r>
+              <a:rPr lang="es-MX" sz="1500" dirty="0">
+                <a:effectLst/>
                 <a:latin typeface="Century Gothic" panose="020B0502020202020204" pitchFamily="34" charset="0"/>
-                <a:ea typeface="Glacial Indifference"/>
-                <a:cs typeface="Glacial Indifference"/>
-                <a:sym typeface="Glacial Indifference"/>
-              </a:rPr>
-              <a:t> Ingenieria del software </a:t>
-            </a:r>
-          </a:p>
-          <a:p>
-            <a:pPr algn="ctr"/>
-            <a:r>
-              <a:rPr lang="en-US" sz="1600" dirty="0" err="1">
-                <a:solidFill>
-                  <a:srgbClr val="000000"/>
-                </a:solidFill>
-                <a:latin typeface="Century Gothic" panose="020B0502020202020204" pitchFamily="34" charset="0"/>
-                <a:ea typeface="Glacial Indifference"/>
-                <a:cs typeface="Glacial Indifference"/>
-                <a:sym typeface="Glacial Indifference"/>
-              </a:rPr>
-              <a:t>Semestre</a:t>
-            </a:r>
-            <a:r>
-              <a:rPr lang="en-US" sz="1600" dirty="0">
-                <a:solidFill>
-                  <a:srgbClr val="000000"/>
-                </a:solidFill>
-                <a:latin typeface="Century Gothic" panose="020B0502020202020204" pitchFamily="34" charset="0"/>
-                <a:ea typeface="Glacial Indifference"/>
-                <a:cs typeface="Glacial Indifference"/>
-                <a:sym typeface="Glacial Indifference"/>
-              </a:rPr>
-              <a:t>: </a:t>
-            </a:r>
-          </a:p>
-          <a:p>
-            <a:pPr algn="ctr"/>
-            <a:r>
-              <a:rPr lang="en-US" sz="1600" dirty="0">
-                <a:solidFill>
-                  <a:srgbClr val="000000"/>
-                </a:solidFill>
-                <a:latin typeface="Century Gothic" panose="020B0502020202020204" pitchFamily="34" charset="0"/>
-                <a:ea typeface="Glacial Indifference"/>
-                <a:cs typeface="Glacial Indifference"/>
-                <a:sym typeface="Glacial Indifference"/>
-              </a:rPr>
-              <a:t>Sexto </a:t>
-            </a:r>
-            <a:r>
-              <a:rPr lang="en-US" sz="1600" dirty="0" err="1">
-                <a:solidFill>
-                  <a:srgbClr val="000000"/>
-                </a:solidFill>
-                <a:latin typeface="Century Gothic" panose="020B0502020202020204" pitchFamily="34" charset="0"/>
-                <a:ea typeface="Glacial Indifference"/>
-                <a:cs typeface="Glacial Indifference"/>
-                <a:sym typeface="Glacial Indifference"/>
-              </a:rPr>
-              <a:t>semestre</a:t>
-            </a:r>
-            <a:r>
-              <a:rPr lang="en-US" sz="1600" dirty="0">
-                <a:solidFill>
-                  <a:srgbClr val="000000"/>
-                </a:solidFill>
-                <a:latin typeface="Century Gothic" panose="020B0502020202020204" pitchFamily="34" charset="0"/>
-                <a:ea typeface="Glacial Indifference"/>
-                <a:cs typeface="Glacial Indifference"/>
-                <a:sym typeface="Glacial Indifference"/>
+                <a:ea typeface="Calibri" panose="020F0502020204030204" pitchFamily="34" charset="0"/>
+                <a:cs typeface="Arial" panose="020B0604020202020204" pitchFamily="34" charset="0"/>
               </a:rPr>
               <a:t> </a:t>
             </a:r>
-          </a:p>
-          <a:p>
-            <a:pPr algn="ctr"/>
-            <a:r>
-              <a:rPr lang="en-US" sz="1600" dirty="0" err="1">
-                <a:solidFill>
-                  <a:srgbClr val="000000"/>
-                </a:solidFill>
+            <a:endParaRPr lang="es-MX" sz="1500" dirty="0">
+              <a:effectLst/>
+              <a:latin typeface="Century Gothic" panose="020B0502020202020204" pitchFamily="34" charset="0"/>
+              <a:ea typeface="Calibri" panose="020F0502020204030204" pitchFamily="34" charset="0"/>
+              <a:cs typeface="Times New Roman" panose="02020603050405020304" pitchFamily="18" charset="0"/>
+            </a:endParaRPr>
+          </a:p>
+          <a:p>
+            <a:pPr algn="ctr">
+              <a:lnSpc>
+                <a:spcPct val="107000"/>
+              </a:lnSpc>
+              <a:spcAft>
+                <a:spcPts val="800"/>
+              </a:spcAft>
+            </a:pPr>
+            <a:r>
+              <a:rPr lang="es-MX" sz="1500" dirty="0">
+                <a:effectLst/>
                 <a:latin typeface="Century Gothic" panose="020B0502020202020204" pitchFamily="34" charset="0"/>
-                <a:ea typeface="Glacial Indifference"/>
-                <a:cs typeface="Glacial Indifference"/>
-                <a:sym typeface="Glacial Indifference"/>
+                <a:ea typeface="Calibri" panose="020F0502020204030204" pitchFamily="34" charset="0"/>
+                <a:cs typeface="Arial" panose="020B0604020202020204" pitchFamily="34" charset="0"/>
               </a:rPr>
-              <a:t>Especialidad</a:t>
-            </a:r>
-            <a:r>
-              <a:rPr lang="en-US" sz="1600" dirty="0">
-                <a:solidFill>
-                  <a:srgbClr val="000000"/>
-                </a:solidFill>
+              <a:t>Cynthia Jasmine Morales Torres </a:t>
+            </a:r>
+          </a:p>
+          <a:p>
+            <a:pPr algn="ctr">
+              <a:lnSpc>
+                <a:spcPct val="107000"/>
+              </a:lnSpc>
+              <a:spcAft>
+                <a:spcPts val="800"/>
+              </a:spcAft>
+            </a:pPr>
+            <a:r>
+              <a:rPr lang="es-MX" sz="1500" dirty="0">
+                <a:effectLst/>
                 <a:latin typeface="Century Gothic" panose="020B0502020202020204" pitchFamily="34" charset="0"/>
-                <a:ea typeface="Glacial Indifference"/>
-                <a:cs typeface="Glacial Indifference"/>
-                <a:sym typeface="Glacial Indifference"/>
-              </a:rPr>
-              <a:t>:</a:t>
-            </a:r>
-          </a:p>
-          <a:p>
-            <a:pPr algn="ctr"/>
-            <a:r>
-              <a:rPr lang="en-US" sz="1600" dirty="0">
-                <a:solidFill>
-                  <a:srgbClr val="000000"/>
-                </a:solidFill>
-                <a:latin typeface="Century Gothic" panose="020B0502020202020204" pitchFamily="34" charset="0"/>
-                <a:ea typeface="Glacial Indifference"/>
-                <a:cs typeface="Glacial Indifference"/>
-                <a:sym typeface="Glacial Indifference"/>
-              </a:rPr>
-              <a:t> Ingeniería </a:t>
-            </a:r>
-            <a:r>
-              <a:rPr lang="en-US" sz="1600" dirty="0" err="1">
-                <a:solidFill>
-                  <a:srgbClr val="000000"/>
-                </a:solidFill>
-                <a:latin typeface="Century Gothic" panose="020B0502020202020204" pitchFamily="34" charset="0"/>
-                <a:ea typeface="Glacial Indifference"/>
-                <a:cs typeface="Glacial Indifference"/>
-                <a:sym typeface="Glacial Indifference"/>
-              </a:rPr>
-              <a:t>en</a:t>
-            </a:r>
-            <a:r>
-              <a:rPr lang="en-US" sz="1600" dirty="0">
-                <a:solidFill>
-                  <a:srgbClr val="000000"/>
-                </a:solidFill>
-                <a:latin typeface="Century Gothic" panose="020B0502020202020204" pitchFamily="34" charset="0"/>
-                <a:ea typeface="Glacial Indifference"/>
-                <a:cs typeface="Glacial Indifference"/>
-                <a:sym typeface="Glacial Indifference"/>
-              </a:rPr>
-              <a:t> Sistemas </a:t>
-            </a:r>
-            <a:r>
-              <a:rPr lang="en-US" sz="1600" dirty="0" err="1">
-                <a:solidFill>
-                  <a:srgbClr val="000000"/>
-                </a:solidFill>
-                <a:latin typeface="Century Gothic" panose="020B0502020202020204" pitchFamily="34" charset="0"/>
-                <a:ea typeface="Glacial Indifference"/>
-                <a:cs typeface="Glacial Indifference"/>
-                <a:sym typeface="Glacial Indifference"/>
-              </a:rPr>
-              <a:t>Computacionales</a:t>
-            </a:r>
-            <a:r>
-              <a:rPr lang="en-US" sz="1600" dirty="0">
-                <a:solidFill>
-                  <a:srgbClr val="000000"/>
-                </a:solidFill>
-                <a:latin typeface="Century Gothic" panose="020B0502020202020204" pitchFamily="34" charset="0"/>
-                <a:ea typeface="Glacial Indifference"/>
-                <a:cs typeface="Glacial Indifference"/>
-                <a:sym typeface="Glacial Indifference"/>
-              </a:rPr>
-              <a:t>.</a:t>
-            </a:r>
-          </a:p>
-          <a:p>
-            <a:pPr algn="ctr"/>
-            <a:r>
-              <a:rPr lang="en-US" sz="1600" dirty="0">
-                <a:solidFill>
-                  <a:srgbClr val="000000"/>
-                </a:solidFill>
-                <a:latin typeface="Century Gothic" panose="020B0502020202020204" pitchFamily="34" charset="0"/>
-                <a:ea typeface="Glacial Indifference"/>
-                <a:cs typeface="Glacial Indifference"/>
-                <a:sym typeface="Glacial Indifference"/>
+                <a:ea typeface="Calibri" panose="020F0502020204030204" pitchFamily="34" charset="0"/>
+                <a:cs typeface="Arial" panose="020B0604020202020204" pitchFamily="34" charset="0"/>
               </a:rPr>
               <a:t> </a:t>
             </a:r>
             <a:r>
-              <a:rPr lang="en-US" sz="1600" dirty="0" err="1">
-                <a:solidFill>
-                  <a:srgbClr val="000000"/>
-                </a:solidFill>
+              <a:rPr lang="es-MX" sz="1500" b="1" dirty="0">
+                <a:effectLst/>
                 <a:latin typeface="Century Gothic" panose="020B0502020202020204" pitchFamily="34" charset="0"/>
-                <a:ea typeface="Glacial Indifference"/>
-                <a:cs typeface="Glacial Indifference"/>
-                <a:sym typeface="Glacial Indifference"/>
+                <a:ea typeface="Calibri" panose="020F0502020204030204" pitchFamily="34" charset="0"/>
+                <a:cs typeface="Arial" panose="020B0604020202020204" pitchFamily="34" charset="0"/>
               </a:rPr>
-              <a:t>Numero</a:t>
-            </a:r>
-            <a:r>
-              <a:rPr lang="en-US" sz="1600" dirty="0">
-                <a:solidFill>
-                  <a:srgbClr val="000000"/>
-                </a:solidFill>
+              <a:t>231260014</a:t>
+            </a:r>
+            <a:endParaRPr lang="es-MX" sz="1500" b="1" dirty="0">
+              <a:effectLst/>
+              <a:latin typeface="Century Gothic" panose="020B0502020202020204" pitchFamily="34" charset="0"/>
+              <a:ea typeface="Calibri" panose="020F0502020204030204" pitchFamily="34" charset="0"/>
+              <a:cs typeface="Times New Roman" panose="02020603050405020304" pitchFamily="18" charset="0"/>
+            </a:endParaRPr>
+          </a:p>
+          <a:p>
+            <a:pPr algn="ctr">
+              <a:lnSpc>
+                <a:spcPct val="107000"/>
+              </a:lnSpc>
+              <a:spcAft>
+                <a:spcPts val="800"/>
+              </a:spcAft>
+            </a:pPr>
+            <a:r>
+              <a:rPr lang="es-MX" sz="1500" dirty="0">
+                <a:effectLst/>
                 <a:latin typeface="Century Gothic" panose="020B0502020202020204" pitchFamily="34" charset="0"/>
-                <a:ea typeface="Glacial Indifference"/>
-                <a:cs typeface="Glacial Indifference"/>
-                <a:sym typeface="Glacial Indifference"/>
+                <a:ea typeface="Calibri" panose="020F0502020204030204" pitchFamily="34" charset="0"/>
+                <a:cs typeface="Arial" panose="020B0604020202020204" pitchFamily="34" charset="0"/>
               </a:rPr>
-              <a:t> de control:</a:t>
-            </a:r>
-          </a:p>
-          <a:p>
-            <a:pPr algn="ctr"/>
-            <a:r>
-              <a:rPr lang="en-US" sz="1600" dirty="0">
-                <a:solidFill>
-                  <a:srgbClr val="000000"/>
-                </a:solidFill>
+              <a:t>Ángel de Jesús Mazariegos Ortiz </a:t>
+            </a:r>
+          </a:p>
+          <a:p>
+            <a:pPr algn="ctr">
+              <a:lnSpc>
+                <a:spcPct val="107000"/>
+              </a:lnSpc>
+              <a:spcAft>
+                <a:spcPts val="800"/>
+              </a:spcAft>
+            </a:pPr>
+            <a:r>
+              <a:rPr lang="es-MX" sz="1500" dirty="0">
+                <a:effectLst/>
                 <a:latin typeface="Century Gothic" panose="020B0502020202020204" pitchFamily="34" charset="0"/>
-                <a:ea typeface="Glacial Indifference"/>
-                <a:cs typeface="Glacial Indifference"/>
-                <a:sym typeface="Glacial Indifference"/>
-              </a:rPr>
-              <a:t> 231260014</a:t>
-            </a:r>
-          </a:p>
-          <a:p>
-            <a:pPr algn="ctr"/>
-            <a:r>
-              <a:rPr lang="en-US" sz="1600" dirty="0">
-                <a:solidFill>
-                  <a:srgbClr val="000000"/>
-                </a:solidFill>
-                <a:latin typeface="Century Gothic" panose="020B0502020202020204" pitchFamily="34" charset="0"/>
-                <a:ea typeface="Glacial Indifference"/>
-                <a:cs typeface="Glacial Indifference"/>
-                <a:sym typeface="Glacial Indifference"/>
-              </a:rPr>
-              <a:t> Nombre del </a:t>
-            </a:r>
-            <a:r>
-              <a:rPr lang="en-US" sz="1600" dirty="0" err="1">
-                <a:solidFill>
-                  <a:srgbClr val="000000"/>
-                </a:solidFill>
-                <a:latin typeface="Century Gothic" panose="020B0502020202020204" pitchFamily="34" charset="0"/>
-                <a:ea typeface="Glacial Indifference"/>
-                <a:cs typeface="Glacial Indifference"/>
-                <a:sym typeface="Glacial Indifference"/>
-              </a:rPr>
-              <a:t>alumno</a:t>
-            </a:r>
-            <a:r>
-              <a:rPr lang="en-US" sz="1600" dirty="0">
-                <a:solidFill>
-                  <a:srgbClr val="000000"/>
-                </a:solidFill>
-                <a:latin typeface="Century Gothic" panose="020B0502020202020204" pitchFamily="34" charset="0"/>
-                <a:ea typeface="Glacial Indifference"/>
-                <a:cs typeface="Glacial Indifference"/>
-                <a:sym typeface="Glacial Indifference"/>
-              </a:rPr>
-              <a:t>:</a:t>
-            </a:r>
-          </a:p>
-          <a:p>
-            <a:pPr algn="ctr"/>
-            <a:r>
-              <a:rPr lang="en-US" sz="1600" dirty="0">
-                <a:solidFill>
-                  <a:srgbClr val="000000"/>
-                </a:solidFill>
-                <a:latin typeface="Century Gothic" panose="020B0502020202020204" pitchFamily="34" charset="0"/>
-                <a:ea typeface="Glacial Indifference"/>
-                <a:cs typeface="Glacial Indifference"/>
-                <a:sym typeface="Glacial Indifference"/>
-              </a:rPr>
-              <a:t> Cynthia Jasmine Morales Torres</a:t>
-            </a:r>
-          </a:p>
-          <a:p>
-            <a:pPr algn="ctr"/>
-            <a:r>
-              <a:rPr lang="en-US" sz="1600" dirty="0">
-                <a:solidFill>
-                  <a:srgbClr val="000000"/>
-                </a:solidFill>
-                <a:latin typeface="Century Gothic" panose="020B0502020202020204" pitchFamily="34" charset="0"/>
-                <a:ea typeface="Glacial Indifference"/>
-                <a:cs typeface="Glacial Indifference"/>
-                <a:sym typeface="Glacial Indifference"/>
-              </a:rPr>
-              <a:t> Nombre del </a:t>
-            </a:r>
-            <a:r>
-              <a:rPr lang="en-US" sz="1600" dirty="0" err="1">
-                <a:solidFill>
-                  <a:srgbClr val="000000"/>
-                </a:solidFill>
-                <a:latin typeface="Century Gothic" panose="020B0502020202020204" pitchFamily="34" charset="0"/>
-                <a:ea typeface="Glacial Indifference"/>
-                <a:cs typeface="Glacial Indifference"/>
-                <a:sym typeface="Glacial Indifference"/>
-              </a:rPr>
-              <a:t>docente</a:t>
-            </a:r>
-            <a:r>
-              <a:rPr lang="en-US" sz="1600" dirty="0">
-                <a:solidFill>
-                  <a:srgbClr val="000000"/>
-                </a:solidFill>
-                <a:latin typeface="Century Gothic" panose="020B0502020202020204" pitchFamily="34" charset="0"/>
-                <a:ea typeface="Glacial Indifference"/>
-                <a:cs typeface="Glacial Indifference"/>
-                <a:sym typeface="Glacial Indifference"/>
-              </a:rPr>
-              <a:t>: </a:t>
-            </a:r>
-          </a:p>
-          <a:p>
-            <a:pPr algn="ctr"/>
-            <a:r>
-              <a:rPr lang="en-US" sz="1600" dirty="0">
-                <a:solidFill>
-                  <a:srgbClr val="000000"/>
-                </a:solidFill>
-                <a:latin typeface="Century Gothic" panose="020B0502020202020204" pitchFamily="34" charset="0"/>
-                <a:ea typeface="Glacial Indifference"/>
-                <a:cs typeface="Glacial Indifference"/>
-                <a:sym typeface="Glacial Indifference"/>
-              </a:rPr>
-              <a:t>Ing. Francisco Javier Mingo Velazquez </a:t>
-            </a:r>
-          </a:p>
-          <a:p>
-            <a:pPr algn="ctr"/>
-            <a:r>
-              <a:rPr lang="en-US" sz="1600" dirty="0">
-                <a:solidFill>
-                  <a:srgbClr val="000000"/>
-                </a:solidFill>
-                <a:latin typeface="Century Gothic" panose="020B0502020202020204" pitchFamily="34" charset="0"/>
-                <a:ea typeface="Glacial Indifference"/>
-                <a:cs typeface="Glacial Indifference"/>
-                <a:sym typeface="Glacial Indifference"/>
-              </a:rPr>
-              <a:t>Nombre del </a:t>
-            </a:r>
-            <a:r>
-              <a:rPr lang="en-US" sz="1600" dirty="0" err="1">
-                <a:solidFill>
-                  <a:srgbClr val="000000"/>
-                </a:solidFill>
-                <a:latin typeface="Century Gothic" panose="020B0502020202020204" pitchFamily="34" charset="0"/>
-                <a:ea typeface="Glacial Indifference"/>
-                <a:cs typeface="Glacial Indifference"/>
-                <a:sym typeface="Glacial Indifference"/>
-              </a:rPr>
-              <a:t>trabajo</a:t>
-            </a:r>
-            <a:r>
-              <a:rPr lang="en-US" sz="1600" dirty="0">
-                <a:solidFill>
-                  <a:srgbClr val="000000"/>
-                </a:solidFill>
-                <a:latin typeface="Century Gothic" panose="020B0502020202020204" pitchFamily="34" charset="0"/>
-                <a:ea typeface="Glacial Indifference"/>
-                <a:cs typeface="Glacial Indifference"/>
-                <a:sym typeface="Glacial Indifference"/>
-              </a:rPr>
-              <a:t>:</a:t>
-            </a:r>
-          </a:p>
-          <a:p>
-            <a:pPr algn="ctr"/>
-            <a:r>
-              <a:rPr lang="en-US" sz="1600" dirty="0">
-                <a:solidFill>
-                  <a:srgbClr val="000000"/>
-                </a:solidFill>
-                <a:latin typeface="Century Gothic" panose="020B0502020202020204" pitchFamily="34" charset="0"/>
-                <a:ea typeface="Glacial Indifference"/>
-                <a:cs typeface="Glacial Indifference"/>
-                <a:sym typeface="Glacial Indifference"/>
-              </a:rPr>
-              <a:t> 1.1 Mapa mental</a:t>
-            </a:r>
-          </a:p>
-          <a:p>
-            <a:pPr algn="ctr"/>
-            <a:r>
-              <a:rPr lang="en-US" sz="1600" dirty="0">
-                <a:solidFill>
-                  <a:srgbClr val="000000"/>
-                </a:solidFill>
-                <a:latin typeface="Century Gothic" panose="020B0502020202020204" pitchFamily="34" charset="0"/>
-                <a:ea typeface="Glacial Indifference"/>
-                <a:cs typeface="Glacial Indifference"/>
-                <a:sym typeface="Glacial Indifference"/>
+                <a:ea typeface="Calibri" panose="020F0502020204030204" pitchFamily="34" charset="0"/>
+                <a:cs typeface="Arial" panose="020B0604020202020204" pitchFamily="34" charset="0"/>
               </a:rPr>
               <a:t> </a:t>
             </a:r>
             <a:r>
-              <a:rPr lang="en-US" sz="1600" dirty="0" err="1">
-                <a:solidFill>
-                  <a:srgbClr val="000000"/>
-                </a:solidFill>
+              <a:rPr lang="es-MX" sz="1500" b="1" dirty="0">
+                <a:effectLst/>
                 <a:latin typeface="Century Gothic" panose="020B0502020202020204" pitchFamily="34" charset="0"/>
-                <a:ea typeface="Glacial Indifference"/>
-                <a:cs typeface="Glacial Indifference"/>
-                <a:sym typeface="Glacial Indifference"/>
+                <a:ea typeface="Calibri" panose="020F0502020204030204" pitchFamily="34" charset="0"/>
+                <a:cs typeface="Arial" panose="020B0604020202020204" pitchFamily="34" charset="0"/>
               </a:rPr>
-              <a:t>Fecha</a:t>
-            </a:r>
-            <a:r>
-              <a:rPr lang="en-US" sz="1600" dirty="0">
-                <a:solidFill>
-                  <a:srgbClr val="000000"/>
-                </a:solidFill>
+              <a:t>231260003</a:t>
+            </a:r>
+            <a:endParaRPr lang="es-MX" sz="1500" b="1" dirty="0">
+              <a:effectLst/>
+              <a:latin typeface="Century Gothic" panose="020B0502020202020204" pitchFamily="34" charset="0"/>
+              <a:ea typeface="Calibri" panose="020F0502020204030204" pitchFamily="34" charset="0"/>
+              <a:cs typeface="Times New Roman" panose="02020603050405020304" pitchFamily="18" charset="0"/>
+            </a:endParaRPr>
+          </a:p>
+          <a:p>
+            <a:pPr algn="ctr">
+              <a:lnSpc>
+                <a:spcPct val="107000"/>
+              </a:lnSpc>
+              <a:spcAft>
+                <a:spcPts val="800"/>
+              </a:spcAft>
+            </a:pPr>
+            <a:r>
+              <a:rPr lang="es-MX" sz="1500" dirty="0">
+                <a:effectLst/>
                 <a:latin typeface="Century Gothic" panose="020B0502020202020204" pitchFamily="34" charset="0"/>
-                <a:ea typeface="Glacial Indifference"/>
-                <a:cs typeface="Glacial Indifference"/>
-                <a:sym typeface="Glacial Indifference"/>
+                <a:ea typeface="Calibri" panose="020F0502020204030204" pitchFamily="34" charset="0"/>
+                <a:cs typeface="Arial" panose="020B0604020202020204" pitchFamily="34" charset="0"/>
               </a:rPr>
-              <a:t> de </a:t>
-            </a:r>
-            <a:r>
-              <a:rPr lang="en-US" sz="1600" dirty="0" err="1">
-                <a:solidFill>
-                  <a:srgbClr val="000000"/>
-                </a:solidFill>
+              <a:t>Simone Belén López Ramírez </a:t>
+            </a:r>
+          </a:p>
+          <a:p>
+            <a:pPr algn="ctr">
+              <a:lnSpc>
+                <a:spcPct val="107000"/>
+              </a:lnSpc>
+              <a:spcAft>
+                <a:spcPts val="800"/>
+              </a:spcAft>
+            </a:pPr>
+            <a:r>
+              <a:rPr lang="es-MX" sz="1500" dirty="0">
+                <a:effectLst/>
                 <a:latin typeface="Century Gothic" panose="020B0502020202020204" pitchFamily="34" charset="0"/>
-                <a:ea typeface="Glacial Indifference"/>
-                <a:cs typeface="Glacial Indifference"/>
-                <a:sym typeface="Glacial Indifference"/>
+                <a:ea typeface="Calibri" panose="020F0502020204030204" pitchFamily="34" charset="0"/>
+                <a:cs typeface="Arial" panose="020B0604020202020204" pitchFamily="34" charset="0"/>
               </a:rPr>
-              <a:t>entrega</a:t>
-            </a:r>
-            <a:r>
-              <a:rPr lang="en-US" sz="1600" dirty="0">
-                <a:solidFill>
-                  <a:srgbClr val="000000"/>
-                </a:solidFill>
+              <a:t> </a:t>
+            </a:r>
+            <a:r>
+              <a:rPr lang="es-MX" sz="1500" b="1" dirty="0">
+                <a:effectLst/>
                 <a:latin typeface="Century Gothic" panose="020B0502020202020204" pitchFamily="34" charset="0"/>
-                <a:ea typeface="Glacial Indifference"/>
-                <a:cs typeface="Glacial Indifference"/>
-                <a:sym typeface="Glacial Indifference"/>
+                <a:ea typeface="Calibri" panose="020F0502020204030204" pitchFamily="34" charset="0"/>
+                <a:cs typeface="Arial" panose="020B0604020202020204" pitchFamily="34" charset="0"/>
               </a:rPr>
-              <a:t>:</a:t>
-            </a:r>
-          </a:p>
-          <a:p>
-            <a:pPr algn="ctr"/>
-            <a:endParaRPr lang="en-US" sz="1600" dirty="0">
-              <a:solidFill>
-                <a:srgbClr val="000000"/>
-              </a:solidFill>
+              <a:t>231260010</a:t>
+            </a:r>
+            <a:endParaRPr lang="es-MX" sz="1500" b="1" dirty="0">
+              <a:effectLst/>
               <a:latin typeface="Century Gothic" panose="020B0502020202020204" pitchFamily="34" charset="0"/>
-              <a:ea typeface="Glacial Indifference"/>
-              <a:cs typeface="Glacial Indifference"/>
-              <a:sym typeface="Glacial Indifference"/>
+              <a:ea typeface="Calibri" panose="020F0502020204030204" pitchFamily="34" charset="0"/>
+              <a:cs typeface="Times New Roman" panose="02020603050405020304" pitchFamily="18" charset="0"/>
             </a:endParaRPr>
           </a:p>
           <a:p>
-            <a:pPr algn="ctr"/>
-            <a:endParaRPr lang="en-US" sz="1600" dirty="0">
-              <a:solidFill>
-                <a:srgbClr val="000000"/>
-              </a:solidFill>
+            <a:pPr algn="ctr">
+              <a:lnSpc>
+                <a:spcPct val="107000"/>
+              </a:lnSpc>
+              <a:spcAft>
+                <a:spcPts val="800"/>
+              </a:spcAft>
+            </a:pPr>
+            <a:r>
+              <a:rPr lang="es-MX" sz="1500" dirty="0">
+                <a:effectLst/>
+                <a:latin typeface="Century Gothic" panose="020B0502020202020204" pitchFamily="34" charset="0"/>
+                <a:ea typeface="Calibri" panose="020F0502020204030204" pitchFamily="34" charset="0"/>
+                <a:cs typeface="Arial" panose="020B0604020202020204" pitchFamily="34" charset="0"/>
+              </a:rPr>
+              <a:t>Luis Daniel Gómez Santizo </a:t>
+            </a:r>
+          </a:p>
+          <a:p>
+            <a:pPr algn="ctr">
+              <a:lnSpc>
+                <a:spcPct val="107000"/>
+              </a:lnSpc>
+              <a:spcAft>
+                <a:spcPts val="800"/>
+              </a:spcAft>
+            </a:pPr>
+            <a:r>
+              <a:rPr lang="es-MX" sz="1500" dirty="0">
+                <a:effectLst/>
+                <a:latin typeface="Century Gothic" panose="020B0502020202020204" pitchFamily="34" charset="0"/>
+                <a:ea typeface="Calibri" panose="020F0502020204030204" pitchFamily="34" charset="0"/>
+                <a:cs typeface="Arial" panose="020B0604020202020204" pitchFamily="34" charset="0"/>
+              </a:rPr>
+              <a:t> </a:t>
+            </a:r>
+            <a:r>
+              <a:rPr lang="es-MX" sz="1500" b="1" dirty="0">
+                <a:effectLst/>
+                <a:latin typeface="Century Gothic" panose="020B0502020202020204" pitchFamily="34" charset="0"/>
+                <a:ea typeface="Calibri" panose="020F0502020204030204" pitchFamily="34" charset="0"/>
+                <a:cs typeface="Arial" panose="020B0604020202020204" pitchFamily="34" charset="0"/>
+              </a:rPr>
+              <a:t>231260017</a:t>
+            </a:r>
+            <a:endParaRPr lang="es-MX" sz="1500" b="1" dirty="0">
+              <a:effectLst/>
               <a:latin typeface="Century Gothic" panose="020B0502020202020204" pitchFamily="34" charset="0"/>
-              <a:ea typeface="Glacial Indifference"/>
-              <a:cs typeface="Glacial Indifference"/>
-              <a:sym typeface="Glacial Indifference"/>
+              <a:ea typeface="Calibri" panose="020F0502020204030204" pitchFamily="34" charset="0"/>
+              <a:cs typeface="Times New Roman" panose="02020603050405020304" pitchFamily="18" charset="0"/>
             </a:endParaRPr>
-          </a:p>
-          <a:p>
-            <a:pPr algn="ctr"/>
-            <a:r>
-              <a:rPr lang="en-US" sz="1600" dirty="0">
-                <a:solidFill>
-                  <a:srgbClr val="000000"/>
-                </a:solidFill>
-                <a:latin typeface="Century Gothic" panose="020B0502020202020204" pitchFamily="34" charset="0"/>
-                <a:ea typeface="Glacial Indifference"/>
-                <a:cs typeface="Glacial Indifference"/>
-                <a:sym typeface="Glacial Indifference"/>
-              </a:rPr>
-              <a:t> Frontera Comalapa, Chiapas. A 06 de </a:t>
-            </a:r>
-            <a:r>
-              <a:rPr lang="en-US" sz="1600" dirty="0" err="1">
-                <a:solidFill>
-                  <a:srgbClr val="000000"/>
-                </a:solidFill>
-                <a:latin typeface="Century Gothic" panose="020B0502020202020204" pitchFamily="34" charset="0"/>
-                <a:ea typeface="Glacial Indifference"/>
-                <a:cs typeface="Glacial Indifference"/>
-                <a:sym typeface="Glacial Indifference"/>
-              </a:rPr>
-              <a:t>febrero</a:t>
-            </a:r>
-            <a:r>
-              <a:rPr lang="en-US" sz="1600" dirty="0">
-                <a:solidFill>
-                  <a:srgbClr val="000000"/>
-                </a:solidFill>
-                <a:latin typeface="Century Gothic" panose="020B0502020202020204" pitchFamily="34" charset="0"/>
-                <a:ea typeface="Glacial Indifference"/>
-                <a:cs typeface="Glacial Indifference"/>
-                <a:sym typeface="Glacial Indifference"/>
-              </a:rPr>
-              <a:t> del 2026</a:t>
-            </a:r>
           </a:p>
         </p:txBody>
       </p:sp>
@@ -6407,7 +6126,7 @@
         </p:nvSpPr>
         <p:spPr>
           <a:xfrm>
-            <a:off x="1917762" y="1336472"/>
+            <a:off x="1917761" y="691390"/>
             <a:ext cx="8356475" cy="709233"/>
           </a:xfrm>
           <a:prstGeom prst="rect">
@@ -6485,8 +6204,8 @@
         </p:nvGrpSpPr>
         <p:grpSpPr>
           <a:xfrm>
-            <a:off x="382922" y="229932"/>
-            <a:ext cx="2709599" cy="1198176"/>
+            <a:off x="382923" y="229932"/>
+            <a:ext cx="2206166" cy="633097"/>
             <a:chOff x="0" y="0"/>
             <a:chExt cx="3073400" cy="1308100"/>
           </a:xfrm>
@@ -6542,6 +6261,13 @@
               </a:stretch>
             </a:blipFill>
           </p:spPr>
+          <p:txBody>
+            <a:bodyPr/>
+            <a:lstStyle/>
+            <a:p>
+              <a:endParaRPr lang="es-US"/>
+            </a:p>
+          </p:txBody>
         </p:sp>
       </p:grpSp>
       <p:grpSp>
@@ -6558,8 +6284,8 @@
         </p:nvGrpSpPr>
         <p:grpSpPr>
           <a:xfrm>
-            <a:off x="9647873" y="168318"/>
-            <a:ext cx="1978801" cy="1598293"/>
+            <a:off x="9308827" y="16140"/>
+            <a:ext cx="1407120" cy="961839"/>
             <a:chOff x="0" y="0"/>
             <a:chExt cx="1981200" cy="1625600"/>
           </a:xfrm>
@@ -6615,6 +6341,13 @@
               </a:stretch>
             </a:blipFill>
           </p:spPr>
+          <p:txBody>
+            <a:bodyPr/>
+            <a:lstStyle/>
+            <a:p>
+              <a:endParaRPr lang="es-US"/>
+            </a:p>
+          </p:txBody>
         </p:sp>
       </p:grpSp>
       <p:grpSp>
@@ -6631,8 +6364,8 @@
         </p:nvGrpSpPr>
         <p:grpSpPr>
           <a:xfrm>
-            <a:off x="3815638" y="339926"/>
-            <a:ext cx="4338142" cy="886553"/>
+            <a:off x="3969750" y="229932"/>
+            <a:ext cx="3489288" cy="461458"/>
             <a:chOff x="0" y="0"/>
             <a:chExt cx="4343400" cy="901700"/>
           </a:xfrm>
@@ -6688,12 +6421,639 @@
               </a:stretch>
             </a:blipFill>
           </p:spPr>
+          <p:txBody>
+            <a:bodyPr/>
+            <a:lstStyle/>
+            <a:p>
+              <a:endParaRPr lang="es-US"/>
+            </a:p>
+          </p:txBody>
         </p:sp>
       </p:grpSp>
+      <p:sp>
+        <p:nvSpPr>
+          <p:cNvPr id="3" name="CuadroTexto 2">
+            <a:extLst>
+              <a:ext uri="{FF2B5EF4-FFF2-40B4-BE49-F238E27FC236}">
+                <a16:creationId xmlns:a16="http://schemas.microsoft.com/office/drawing/2014/main" id="{FA2F1973-C6C4-0E10-7E9A-C6CDD6203C56}"/>
+              </a:ext>
+            </a:extLst>
+          </p:cNvPr>
+          <p:cNvSpPr txBox="1"/>
+          <p:nvPr/>
+        </p:nvSpPr>
+        <p:spPr>
+          <a:xfrm>
+            <a:off x="382923" y="1910413"/>
+            <a:ext cx="6102848" cy="4016484"/>
+          </a:xfrm>
+          <a:prstGeom prst="rect">
+            <a:avLst/>
+          </a:prstGeom>
+          <a:noFill/>
+        </p:spPr>
+        <p:txBody>
+          <a:bodyPr wrap="square">
+            <a:spAutoFit/>
+          </a:bodyPr>
+          <a:lstStyle/>
+          <a:p>
+            <a:pPr algn="ctr"/>
+            <a:r>
+              <a:rPr lang="en-US" sz="1500" b="1" dirty="0">
+                <a:solidFill>
+                  <a:srgbClr val="000000"/>
+                </a:solidFill>
+                <a:latin typeface="Century Gothic" panose="020B0502020202020204" pitchFamily="34" charset="0"/>
+                <a:ea typeface="Glacial Indifference"/>
+                <a:cs typeface="Glacial Indifference"/>
+                <a:sym typeface="Glacial Indifference"/>
+              </a:rPr>
+              <a:t>Materia:</a:t>
+            </a:r>
+          </a:p>
+          <a:p>
+            <a:pPr algn="ctr"/>
+            <a:r>
+              <a:rPr lang="en-US" sz="1500" dirty="0">
+                <a:solidFill>
+                  <a:srgbClr val="000000"/>
+                </a:solidFill>
+                <a:latin typeface="Century Gothic" panose="020B0502020202020204" pitchFamily="34" charset="0"/>
+                <a:ea typeface="Glacial Indifference"/>
+                <a:cs typeface="Glacial Indifference"/>
+                <a:sym typeface="Glacial Indifference"/>
+              </a:rPr>
+              <a:t> Ingenieria del software </a:t>
+            </a:r>
+          </a:p>
+          <a:p>
+            <a:pPr algn="ctr"/>
+            <a:endParaRPr lang="en-US" sz="1500" dirty="0">
+              <a:solidFill>
+                <a:srgbClr val="000000"/>
+              </a:solidFill>
+              <a:latin typeface="Century Gothic" panose="020B0502020202020204" pitchFamily="34" charset="0"/>
+              <a:ea typeface="Glacial Indifference"/>
+              <a:cs typeface="Glacial Indifference"/>
+              <a:sym typeface="Glacial Indifference"/>
+            </a:endParaRPr>
+          </a:p>
+          <a:p>
+            <a:pPr algn="ctr"/>
+            <a:r>
+              <a:rPr lang="en-US" sz="1500" b="1" dirty="0" err="1">
+                <a:solidFill>
+                  <a:srgbClr val="000000"/>
+                </a:solidFill>
+                <a:latin typeface="Century Gothic" panose="020B0502020202020204" pitchFamily="34" charset="0"/>
+                <a:ea typeface="Glacial Indifference"/>
+                <a:cs typeface="Glacial Indifference"/>
+                <a:sym typeface="Glacial Indifference"/>
+              </a:rPr>
+              <a:t>Semestre</a:t>
+            </a:r>
+            <a:r>
+              <a:rPr lang="en-US" sz="1500" b="1" dirty="0">
+                <a:solidFill>
+                  <a:srgbClr val="000000"/>
+                </a:solidFill>
+                <a:latin typeface="Century Gothic" panose="020B0502020202020204" pitchFamily="34" charset="0"/>
+                <a:ea typeface="Glacial Indifference"/>
+                <a:cs typeface="Glacial Indifference"/>
+                <a:sym typeface="Glacial Indifference"/>
+              </a:rPr>
+              <a:t>: </a:t>
+            </a:r>
+          </a:p>
+          <a:p>
+            <a:pPr algn="ctr"/>
+            <a:r>
+              <a:rPr lang="en-US" sz="1500" dirty="0">
+                <a:solidFill>
+                  <a:srgbClr val="000000"/>
+                </a:solidFill>
+                <a:latin typeface="Century Gothic" panose="020B0502020202020204" pitchFamily="34" charset="0"/>
+                <a:ea typeface="Glacial Indifference"/>
+                <a:cs typeface="Glacial Indifference"/>
+                <a:sym typeface="Glacial Indifference"/>
+              </a:rPr>
+              <a:t>Sexto </a:t>
+            </a:r>
+            <a:r>
+              <a:rPr lang="en-US" sz="1500" dirty="0" err="1">
+                <a:solidFill>
+                  <a:srgbClr val="000000"/>
+                </a:solidFill>
+                <a:latin typeface="Century Gothic" panose="020B0502020202020204" pitchFamily="34" charset="0"/>
+                <a:ea typeface="Glacial Indifference"/>
+                <a:cs typeface="Glacial Indifference"/>
+                <a:sym typeface="Glacial Indifference"/>
+              </a:rPr>
+              <a:t>semestre</a:t>
+            </a:r>
+            <a:r>
+              <a:rPr lang="en-US" sz="1500" dirty="0">
+                <a:solidFill>
+                  <a:srgbClr val="000000"/>
+                </a:solidFill>
+                <a:latin typeface="Century Gothic" panose="020B0502020202020204" pitchFamily="34" charset="0"/>
+                <a:ea typeface="Glacial Indifference"/>
+                <a:cs typeface="Glacial Indifference"/>
+                <a:sym typeface="Glacial Indifference"/>
+              </a:rPr>
+              <a:t> </a:t>
+            </a:r>
+          </a:p>
+          <a:p>
+            <a:pPr algn="ctr"/>
+            <a:endParaRPr lang="en-US" sz="1500" dirty="0">
+              <a:solidFill>
+                <a:srgbClr val="000000"/>
+              </a:solidFill>
+              <a:latin typeface="Century Gothic" panose="020B0502020202020204" pitchFamily="34" charset="0"/>
+              <a:ea typeface="Glacial Indifference"/>
+              <a:cs typeface="Glacial Indifference"/>
+              <a:sym typeface="Glacial Indifference"/>
+            </a:endParaRPr>
+          </a:p>
+          <a:p>
+            <a:pPr algn="ctr"/>
+            <a:r>
+              <a:rPr lang="en-US" sz="1500" b="1" dirty="0" err="1">
+                <a:solidFill>
+                  <a:srgbClr val="000000"/>
+                </a:solidFill>
+                <a:latin typeface="Century Gothic" panose="020B0502020202020204" pitchFamily="34" charset="0"/>
+                <a:ea typeface="Glacial Indifference"/>
+                <a:cs typeface="Glacial Indifference"/>
+                <a:sym typeface="Glacial Indifference"/>
+              </a:rPr>
+              <a:t>Especialidad</a:t>
+            </a:r>
+            <a:r>
+              <a:rPr lang="en-US" sz="1500" b="1" dirty="0">
+                <a:solidFill>
+                  <a:srgbClr val="000000"/>
+                </a:solidFill>
+                <a:latin typeface="Century Gothic" panose="020B0502020202020204" pitchFamily="34" charset="0"/>
+                <a:ea typeface="Glacial Indifference"/>
+                <a:cs typeface="Glacial Indifference"/>
+                <a:sym typeface="Glacial Indifference"/>
+              </a:rPr>
+              <a:t>:</a:t>
+            </a:r>
+          </a:p>
+          <a:p>
+            <a:pPr algn="ctr"/>
+            <a:r>
+              <a:rPr lang="en-US" sz="1500" dirty="0">
+                <a:solidFill>
+                  <a:srgbClr val="000000"/>
+                </a:solidFill>
+                <a:latin typeface="Century Gothic" panose="020B0502020202020204" pitchFamily="34" charset="0"/>
+                <a:ea typeface="Glacial Indifference"/>
+                <a:cs typeface="Glacial Indifference"/>
+                <a:sym typeface="Glacial Indifference"/>
+              </a:rPr>
+              <a:t> Ingeniería </a:t>
+            </a:r>
+            <a:r>
+              <a:rPr lang="en-US" sz="1500" dirty="0" err="1">
+                <a:solidFill>
+                  <a:srgbClr val="000000"/>
+                </a:solidFill>
+                <a:latin typeface="Century Gothic" panose="020B0502020202020204" pitchFamily="34" charset="0"/>
+                <a:ea typeface="Glacial Indifference"/>
+                <a:cs typeface="Glacial Indifference"/>
+                <a:sym typeface="Glacial Indifference"/>
+              </a:rPr>
+              <a:t>en</a:t>
+            </a:r>
+            <a:r>
+              <a:rPr lang="en-US" sz="1500" dirty="0">
+                <a:solidFill>
+                  <a:srgbClr val="000000"/>
+                </a:solidFill>
+                <a:latin typeface="Century Gothic" panose="020B0502020202020204" pitchFamily="34" charset="0"/>
+                <a:ea typeface="Glacial Indifference"/>
+                <a:cs typeface="Glacial Indifference"/>
+                <a:sym typeface="Glacial Indifference"/>
+              </a:rPr>
+              <a:t> Sistemas </a:t>
+            </a:r>
+            <a:r>
+              <a:rPr lang="en-US" sz="1500" dirty="0" err="1">
+                <a:solidFill>
+                  <a:srgbClr val="000000"/>
+                </a:solidFill>
+                <a:latin typeface="Century Gothic" panose="020B0502020202020204" pitchFamily="34" charset="0"/>
+                <a:ea typeface="Glacial Indifference"/>
+                <a:cs typeface="Glacial Indifference"/>
+                <a:sym typeface="Glacial Indifference"/>
+              </a:rPr>
+              <a:t>Computacionales</a:t>
+            </a:r>
+            <a:r>
+              <a:rPr lang="en-US" sz="1500" dirty="0">
+                <a:solidFill>
+                  <a:srgbClr val="000000"/>
+                </a:solidFill>
+                <a:latin typeface="Century Gothic" panose="020B0502020202020204" pitchFamily="34" charset="0"/>
+                <a:ea typeface="Glacial Indifference"/>
+                <a:cs typeface="Glacial Indifference"/>
+                <a:sym typeface="Glacial Indifference"/>
+              </a:rPr>
+              <a:t>.</a:t>
+            </a:r>
+          </a:p>
+          <a:p>
+            <a:pPr algn="ctr"/>
+            <a:endParaRPr lang="en-US" sz="1500" dirty="0">
+              <a:solidFill>
+                <a:srgbClr val="000000"/>
+              </a:solidFill>
+              <a:latin typeface="Century Gothic" panose="020B0502020202020204" pitchFamily="34" charset="0"/>
+              <a:ea typeface="Glacial Indifference"/>
+              <a:cs typeface="Glacial Indifference"/>
+              <a:sym typeface="Glacial Indifference"/>
+            </a:endParaRPr>
+          </a:p>
+          <a:p>
+            <a:pPr algn="ctr"/>
+            <a:r>
+              <a:rPr lang="en-US" sz="1500" b="1" dirty="0">
+                <a:solidFill>
+                  <a:srgbClr val="000000"/>
+                </a:solidFill>
+                <a:latin typeface="Century Gothic" panose="020B0502020202020204" pitchFamily="34" charset="0"/>
+                <a:ea typeface="Glacial Indifference"/>
+                <a:cs typeface="Glacial Indifference"/>
+                <a:sym typeface="Glacial Indifference"/>
+              </a:rPr>
+              <a:t>Nombre del </a:t>
+            </a:r>
+            <a:r>
+              <a:rPr lang="en-US" sz="1500" b="1" dirty="0" err="1">
+                <a:solidFill>
+                  <a:srgbClr val="000000"/>
+                </a:solidFill>
+                <a:latin typeface="Century Gothic" panose="020B0502020202020204" pitchFamily="34" charset="0"/>
+                <a:ea typeface="Glacial Indifference"/>
+                <a:cs typeface="Glacial Indifference"/>
+                <a:sym typeface="Glacial Indifference"/>
+              </a:rPr>
+              <a:t>docente</a:t>
+            </a:r>
+            <a:r>
+              <a:rPr lang="en-US" sz="1500" b="1" dirty="0">
+                <a:solidFill>
+                  <a:srgbClr val="000000"/>
+                </a:solidFill>
+                <a:latin typeface="Century Gothic" panose="020B0502020202020204" pitchFamily="34" charset="0"/>
+                <a:ea typeface="Glacial Indifference"/>
+                <a:cs typeface="Glacial Indifference"/>
+                <a:sym typeface="Glacial Indifference"/>
+              </a:rPr>
+              <a:t>: </a:t>
+            </a:r>
+          </a:p>
+          <a:p>
+            <a:pPr algn="ctr"/>
+            <a:r>
+              <a:rPr lang="en-US" sz="1500" dirty="0">
+                <a:solidFill>
+                  <a:srgbClr val="000000"/>
+                </a:solidFill>
+                <a:latin typeface="Century Gothic" panose="020B0502020202020204" pitchFamily="34" charset="0"/>
+                <a:ea typeface="Glacial Indifference"/>
+                <a:cs typeface="Glacial Indifference"/>
+                <a:sym typeface="Glacial Indifference"/>
+              </a:rPr>
+              <a:t>Ing. Francisco Javier Mingo Velazquez </a:t>
+            </a:r>
+          </a:p>
+          <a:p>
+            <a:pPr algn="ctr"/>
+            <a:endParaRPr lang="en-US" sz="1500" dirty="0">
+              <a:solidFill>
+                <a:srgbClr val="000000"/>
+              </a:solidFill>
+              <a:latin typeface="Century Gothic" panose="020B0502020202020204" pitchFamily="34" charset="0"/>
+              <a:ea typeface="Glacial Indifference"/>
+              <a:cs typeface="Glacial Indifference"/>
+              <a:sym typeface="Glacial Indifference"/>
+            </a:endParaRPr>
+          </a:p>
+          <a:p>
+            <a:pPr algn="ctr"/>
+            <a:r>
+              <a:rPr lang="en-US" sz="1500" b="1" dirty="0">
+                <a:solidFill>
+                  <a:srgbClr val="000000"/>
+                </a:solidFill>
+                <a:latin typeface="Century Gothic" panose="020B0502020202020204" pitchFamily="34" charset="0"/>
+                <a:ea typeface="Glacial Indifference"/>
+                <a:cs typeface="Glacial Indifference"/>
+                <a:sym typeface="Glacial Indifference"/>
+              </a:rPr>
+              <a:t>Nombre del </a:t>
+            </a:r>
+            <a:r>
+              <a:rPr lang="en-US" sz="1500" b="1" dirty="0" err="1">
+                <a:solidFill>
+                  <a:srgbClr val="000000"/>
+                </a:solidFill>
+                <a:latin typeface="Century Gothic" panose="020B0502020202020204" pitchFamily="34" charset="0"/>
+                <a:ea typeface="Glacial Indifference"/>
+                <a:cs typeface="Glacial Indifference"/>
+                <a:sym typeface="Glacial Indifference"/>
+              </a:rPr>
+              <a:t>trabajo</a:t>
+            </a:r>
+            <a:r>
+              <a:rPr lang="en-US" sz="1500" b="1" dirty="0">
+                <a:solidFill>
+                  <a:srgbClr val="000000"/>
+                </a:solidFill>
+                <a:latin typeface="Century Gothic" panose="020B0502020202020204" pitchFamily="34" charset="0"/>
+                <a:ea typeface="Glacial Indifference"/>
+                <a:cs typeface="Glacial Indifference"/>
+                <a:sym typeface="Glacial Indifference"/>
+              </a:rPr>
+              <a:t>:</a:t>
+            </a:r>
+          </a:p>
+          <a:p>
+            <a:pPr algn="ctr"/>
+            <a:r>
+              <a:rPr lang="en-US" sz="1500" dirty="0">
+                <a:solidFill>
+                  <a:srgbClr val="000000"/>
+                </a:solidFill>
+                <a:latin typeface="Century Gothic" panose="020B0502020202020204" pitchFamily="34" charset="0"/>
+                <a:ea typeface="Glacial Indifference"/>
+                <a:cs typeface="Glacial Indifference"/>
+                <a:sym typeface="Glacial Indifference"/>
+              </a:rPr>
+              <a:t> 1.1 Mapa mental</a:t>
+            </a:r>
+          </a:p>
+          <a:p>
+            <a:pPr algn="ctr"/>
+            <a:endParaRPr lang="en-US" sz="1500" dirty="0">
+              <a:solidFill>
+                <a:srgbClr val="000000"/>
+              </a:solidFill>
+              <a:latin typeface="Century Gothic" panose="020B0502020202020204" pitchFamily="34" charset="0"/>
+              <a:ea typeface="Glacial Indifference"/>
+              <a:cs typeface="Glacial Indifference"/>
+              <a:sym typeface="Glacial Indifference"/>
+            </a:endParaRPr>
+          </a:p>
+          <a:p>
+            <a:pPr algn="ctr"/>
+            <a:r>
+              <a:rPr lang="en-US" sz="1500" dirty="0">
+                <a:solidFill>
+                  <a:srgbClr val="000000"/>
+                </a:solidFill>
+                <a:latin typeface="Century Gothic" panose="020B0502020202020204" pitchFamily="34" charset="0"/>
+                <a:ea typeface="Glacial Indifference"/>
+                <a:cs typeface="Glacial Indifference"/>
+                <a:sym typeface="Glacial Indifference"/>
+              </a:rPr>
+              <a:t> </a:t>
+            </a:r>
+            <a:r>
+              <a:rPr lang="en-US" sz="1500" b="1" dirty="0" err="1">
+                <a:solidFill>
+                  <a:srgbClr val="000000"/>
+                </a:solidFill>
+                <a:latin typeface="Century Gothic" panose="020B0502020202020204" pitchFamily="34" charset="0"/>
+                <a:ea typeface="Glacial Indifference"/>
+                <a:cs typeface="Glacial Indifference"/>
+                <a:sym typeface="Glacial Indifference"/>
+              </a:rPr>
+              <a:t>Fecha</a:t>
+            </a:r>
+            <a:r>
+              <a:rPr lang="en-US" sz="1500" b="1" dirty="0">
+                <a:solidFill>
+                  <a:srgbClr val="000000"/>
+                </a:solidFill>
+                <a:latin typeface="Century Gothic" panose="020B0502020202020204" pitchFamily="34" charset="0"/>
+                <a:ea typeface="Glacial Indifference"/>
+                <a:cs typeface="Glacial Indifference"/>
+                <a:sym typeface="Glacial Indifference"/>
+              </a:rPr>
+              <a:t> de </a:t>
+            </a:r>
+            <a:r>
+              <a:rPr lang="en-US" sz="1500" b="1" dirty="0" err="1">
+                <a:solidFill>
+                  <a:srgbClr val="000000"/>
+                </a:solidFill>
+                <a:latin typeface="Century Gothic" panose="020B0502020202020204" pitchFamily="34" charset="0"/>
+                <a:ea typeface="Glacial Indifference"/>
+                <a:cs typeface="Glacial Indifference"/>
+                <a:sym typeface="Glacial Indifference"/>
+              </a:rPr>
+              <a:t>entrega</a:t>
+            </a:r>
+            <a:r>
+              <a:rPr lang="en-US" sz="1500" b="1" dirty="0">
+                <a:solidFill>
+                  <a:srgbClr val="000000"/>
+                </a:solidFill>
+                <a:latin typeface="Century Gothic" panose="020B0502020202020204" pitchFamily="34" charset="0"/>
+                <a:ea typeface="Glacial Indifference"/>
+                <a:cs typeface="Glacial Indifference"/>
+                <a:sym typeface="Glacial Indifference"/>
+              </a:rPr>
+              <a:t>:</a:t>
+            </a:r>
+          </a:p>
+          <a:p>
+            <a:pPr algn="ctr"/>
+            <a:r>
+              <a:rPr lang="en-US" sz="1500" b="1" dirty="0">
+                <a:solidFill>
+                  <a:srgbClr val="000000"/>
+                </a:solidFill>
+                <a:latin typeface="Century Gothic" panose="020B0502020202020204" pitchFamily="34" charset="0"/>
+                <a:ea typeface="Glacial Indifference"/>
+                <a:cs typeface="Glacial Indifference"/>
+                <a:sym typeface="Glacial Indifference"/>
+              </a:rPr>
+              <a:t>06/02/2026</a:t>
+            </a:r>
+          </a:p>
+        </p:txBody>
+      </p:sp>
+      <p:sp>
+        <p:nvSpPr>
+          <p:cNvPr id="5" name="CuadroTexto 4">
+            <a:extLst>
+              <a:ext uri="{FF2B5EF4-FFF2-40B4-BE49-F238E27FC236}">
+                <a16:creationId xmlns:a16="http://schemas.microsoft.com/office/drawing/2014/main" id="{3F7CFD71-1FDB-0B9B-AF91-5A7AC4F4B655}"/>
+              </a:ext>
+            </a:extLst>
+          </p:cNvPr>
+          <p:cNvSpPr txBox="1"/>
+          <p:nvPr/>
+        </p:nvSpPr>
+        <p:spPr>
+          <a:xfrm>
+            <a:off x="3143892" y="6436687"/>
+            <a:ext cx="6359702" cy="369332"/>
+          </a:xfrm>
+          <a:prstGeom prst="rect">
+            <a:avLst/>
+          </a:prstGeom>
+          <a:noFill/>
+        </p:spPr>
+        <p:txBody>
+          <a:bodyPr wrap="square">
+            <a:spAutoFit/>
+          </a:bodyPr>
+          <a:lstStyle/>
+          <a:p>
+            <a:r>
+              <a:rPr lang="en-US" sz="1800" dirty="0">
+                <a:solidFill>
+                  <a:srgbClr val="000000"/>
+                </a:solidFill>
+                <a:latin typeface="Century Gothic" panose="020B0502020202020204" pitchFamily="34" charset="0"/>
+                <a:ea typeface="Glacial Indifference"/>
+                <a:cs typeface="Glacial Indifference"/>
+                <a:sym typeface="Glacial Indifference"/>
+              </a:rPr>
+              <a:t>Frontera Comalapa, Chiapas. A 06 de </a:t>
+            </a:r>
+            <a:r>
+              <a:rPr lang="en-US" sz="1800" dirty="0" err="1">
+                <a:solidFill>
+                  <a:srgbClr val="000000"/>
+                </a:solidFill>
+                <a:latin typeface="Century Gothic" panose="020B0502020202020204" pitchFamily="34" charset="0"/>
+                <a:ea typeface="Glacial Indifference"/>
+                <a:cs typeface="Glacial Indifference"/>
+                <a:sym typeface="Glacial Indifference"/>
+              </a:rPr>
+              <a:t>febrero</a:t>
+            </a:r>
+            <a:r>
+              <a:rPr lang="en-US" sz="1800" dirty="0">
+                <a:solidFill>
+                  <a:srgbClr val="000000"/>
+                </a:solidFill>
+                <a:latin typeface="Century Gothic" panose="020B0502020202020204" pitchFamily="34" charset="0"/>
+                <a:ea typeface="Glacial Indifference"/>
+                <a:cs typeface="Glacial Indifference"/>
+                <a:sym typeface="Glacial Indifference"/>
+              </a:rPr>
+              <a:t> del 2026</a:t>
+            </a:r>
+            <a:endParaRPr lang="es-MX" dirty="0"/>
+          </a:p>
+        </p:txBody>
+      </p:sp>
     </p:spTree>
     <p:extLst>
       <p:ext uri="{BB962C8B-B14F-4D97-AF65-F5344CB8AC3E}">
         <p14:creationId xmlns:p14="http://schemas.microsoft.com/office/powerpoint/2010/main" val="1761692468"/>
+      </p:ext>
+    </p:extLst>
+  </p:cSld>
+  <p:clrMapOvr>
+    <a:masterClrMapping/>
+  </p:clrMapOvr>
+</p:sld>
+</file>
+
+<file path=ppt/slides/slide10.xml><?xml version="1.0" encoding="utf-8"?>
+<p:sld xmlns:a="http://schemas.openxmlformats.org/drawingml/2006/main" xmlns:r="http://schemas.openxmlformats.org/officeDocument/2006/relationships" xmlns:p="http://schemas.openxmlformats.org/presentationml/2006/main">
+  <p:cSld>
+    <p:spTree>
+      <p:nvGrpSpPr>
+        <p:cNvPr id="1" name=""/>
+        <p:cNvGrpSpPr/>
+        <p:nvPr/>
+      </p:nvGrpSpPr>
+      <p:grpSpPr>
+        <a:xfrm>
+          <a:off x="0" y="0"/>
+          <a:ext cx="0" cy="0"/>
+          <a:chOff x="0" y="0"/>
+          <a:chExt cx="0" cy="0"/>
+        </a:xfrm>
+      </p:grpSpPr>
+      <p:sp>
+        <p:nvSpPr>
+          <p:cNvPr id="2" name="Título 1">
+            <a:extLst>
+              <a:ext uri="{FF2B5EF4-FFF2-40B4-BE49-F238E27FC236}">
+                <a16:creationId xmlns:a16="http://schemas.microsoft.com/office/drawing/2014/main" id="{775EB4DD-C0CC-879D-B612-695F499DF281}"/>
+              </a:ext>
+            </a:extLst>
+          </p:cNvPr>
+          <p:cNvSpPr>
+            <a:spLocks noGrp="1"/>
+          </p:cNvSpPr>
+          <p:nvPr>
+            <p:ph type="title"/>
+          </p:nvPr>
+        </p:nvSpPr>
+        <p:spPr/>
+        <p:txBody>
+          <a:bodyPr/>
+          <a:lstStyle/>
+          <a:p>
+            <a:r>
+              <a:rPr lang="es-MX" dirty="0"/>
+              <a:t>Anexo link de la actividad solicitada y subida a GitHub:</a:t>
+            </a:r>
+          </a:p>
+        </p:txBody>
+      </p:sp>
+      <p:sp>
+        <p:nvSpPr>
+          <p:cNvPr id="3" name="Marcador de contenido 2">
+            <a:extLst>
+              <a:ext uri="{FF2B5EF4-FFF2-40B4-BE49-F238E27FC236}">
+                <a16:creationId xmlns:a16="http://schemas.microsoft.com/office/drawing/2014/main" id="{ED2570EF-8418-9140-DCEC-E40310D403D1}"/>
+              </a:ext>
+            </a:extLst>
+          </p:cNvPr>
+          <p:cNvSpPr>
+            <a:spLocks noGrp="1"/>
+          </p:cNvSpPr>
+          <p:nvPr>
+            <p:ph idx="1"/>
+          </p:nvPr>
+        </p:nvSpPr>
+        <p:spPr>
+          <a:xfrm>
+            <a:off x="677334" y="2160589"/>
+            <a:ext cx="8596668" cy="962755"/>
+          </a:xfrm>
+        </p:spPr>
+        <p:txBody>
+          <a:bodyPr/>
+          <a:lstStyle/>
+          <a:p>
+            <a:pPr marL="0" indent="0">
+              <a:buNone/>
+            </a:pPr>
+            <a:endParaRPr lang="es-MX" dirty="0"/>
+          </a:p>
+        </p:txBody>
+      </p:sp>
+    </p:spTree>
+    <p:extLst>
+      <p:ext uri="{BB962C8B-B14F-4D97-AF65-F5344CB8AC3E}">
+        <p14:creationId xmlns:p14="http://schemas.microsoft.com/office/powerpoint/2010/main" val="964952945"/>
       </p:ext>
     </p:extLst>
   </p:cSld>
@@ -6736,11 +7096,17 @@
             <p:ph type="title"/>
           </p:nvPr>
         </p:nvSpPr>
-        <p:spPr/>
+        <p:spPr>
+          <a:xfrm>
+            <a:off x="-2407185" y="847760"/>
+            <a:ext cx="8596668" cy="1320800"/>
+          </a:xfrm>
+        </p:spPr>
         <p:txBody>
           <a:bodyPr/>
           <a:lstStyle/>
           <a:p>
+            <a:pPr algn="ctr"/>
             <a:r>
               <a:rPr lang="es-MX" dirty="0"/>
               <a:t>Introducción </a:t>
@@ -6764,7 +7130,12 @@
             <p:ph idx="1"/>
           </p:nvPr>
         </p:nvSpPr>
-        <p:spPr/>
+        <p:spPr>
+          <a:xfrm>
+            <a:off x="552998" y="1735435"/>
+            <a:ext cx="8596668" cy="3880773"/>
+          </a:xfrm>
+        </p:spPr>
         <p:txBody>
           <a:bodyPr/>
           <a:lstStyle/>
@@ -6776,6 +7147,11 @@
               <a:rPr lang="es-MX" dirty="0"/>
               <a:t>El siguiente diagrama UML de clases muestra la estructura general de un sistema de control de asistencia con biometría, basado en reconocimiento facial y huella digital. El modelo representa las clases principales, sus atributos, métodos y relaciones, permitiendo visualizar cómo se organiza el sistema para validar usuarios, registrar asistencias, generar reportes y proteger los datos.</a:t>
             </a:r>
+            <a:r>
+              <a:rPr lang="es-US" dirty="0"/>
+              <a:t> El sistema presentado consiste en una solución integral de reloj chocador biométrico diseñada para la gestión de asistencia y seguridad de datos. El núcleo del sistema se basa en el modelo de clases UML, donde la clase principal, Usuario, centraliza los datos generales y las plantillas biométricas (rostro y huella). A través de una arquitectura de herencia, el sistema distingue roles específicos como el de Catedrático, encargado de registrar entradas y salidas, y el de Administrador, responsable de la gestión de usuarios y la configuración global del sistema. </a:t>
+            </a:r>
+            <a:endParaRPr lang="es-MX" dirty="0"/>
           </a:p>
         </p:txBody>
       </p:sp>
@@ -6811,6 +7187,169 @@
       </p:grpSpPr>
       <p:sp>
         <p:nvSpPr>
+          <p:cNvPr id="2" name="Título 1">
+            <a:extLst>
+              <a:ext uri="{FF2B5EF4-FFF2-40B4-BE49-F238E27FC236}">
+                <a16:creationId xmlns:a16="http://schemas.microsoft.com/office/drawing/2014/main" id="{1A128D5E-6341-6D21-830D-E4F7D108D85B}"/>
+              </a:ext>
+            </a:extLst>
+          </p:cNvPr>
+          <p:cNvSpPr>
+            <a:spLocks noGrp="1"/>
+          </p:cNvSpPr>
+          <p:nvPr>
+            <p:ph type="title"/>
+          </p:nvPr>
+        </p:nvSpPr>
+        <p:spPr/>
+        <p:txBody>
+          <a:bodyPr/>
+          <a:lstStyle/>
+          <a:p>
+            <a:r>
+              <a:rPr lang="es-US" dirty="0"/>
+              <a:t>Justificación </a:t>
+            </a:r>
+          </a:p>
+        </p:txBody>
+      </p:sp>
+      <p:sp>
+        <p:nvSpPr>
+          <p:cNvPr id="3" name="Marcador de contenido 2">
+            <a:extLst>
+              <a:ext uri="{FF2B5EF4-FFF2-40B4-BE49-F238E27FC236}">
+                <a16:creationId xmlns:a16="http://schemas.microsoft.com/office/drawing/2014/main" id="{034A7264-61B6-1E6E-6FC8-A60ED15BBB3B}"/>
+              </a:ext>
+            </a:extLst>
+          </p:cNvPr>
+          <p:cNvSpPr>
+            <a:spLocks noGrp="1"/>
+          </p:cNvSpPr>
+          <p:nvPr>
+            <p:ph idx="1"/>
+          </p:nvPr>
+        </p:nvSpPr>
+        <p:spPr>
+          <a:xfrm>
+            <a:off x="677334" y="1405694"/>
+            <a:ext cx="8596668" cy="5255145"/>
+          </a:xfrm>
+        </p:spPr>
+        <p:txBody>
+          <a:bodyPr/>
+          <a:lstStyle/>
+          <a:p>
+            <a:pPr marL="0" indent="0" algn="just">
+              <a:buNone/>
+            </a:pPr>
+            <a:r>
+              <a:rPr lang="es-US" dirty="0"/>
+              <a:t>La implementación de este sistema se justifica por la necesidad de modernizar y asegurar los procesos de control de personal mediante las siguientes ventajas:</a:t>
+            </a:r>
+          </a:p>
+          <a:p>
+            <a:pPr marL="0" indent="0" algn="just">
+              <a:buNone/>
+            </a:pPr>
+            <a:r>
+              <a:rPr lang="es-US" dirty="0"/>
+              <a:t>Precisión en la Identificación: Al utilizar biometría (rostro y huella), el sistema garantiza que la identidad del usuario sea única e intransferible, evitando fraudes en el registro de asistencia. </a:t>
+            </a:r>
+          </a:p>
+          <a:p>
+            <a:pPr marL="0" indent="0" algn="just">
+              <a:buNone/>
+            </a:pPr>
+            <a:r>
+              <a:rPr lang="es-US" dirty="0"/>
+              <a:t>Automatización Administrativa: La clase </a:t>
+            </a:r>
+            <a:r>
+              <a:rPr lang="es-US" dirty="0" err="1"/>
+              <a:t>ControlAsistencia</a:t>
+            </a:r>
+            <a:r>
+              <a:rPr lang="es-US" dirty="0"/>
+              <a:t> permite calcular automáticamente los retardos basados en una </a:t>
+            </a:r>
+            <a:r>
+              <a:rPr lang="es-US" dirty="0" err="1"/>
+              <a:t>toleranciaMinutos</a:t>
+            </a:r>
+            <a:r>
+              <a:rPr lang="es-US" dirty="0"/>
+              <a:t>, reduciendo la carga de trabajo manual y el margen de error humano. </a:t>
+            </a:r>
+          </a:p>
+          <a:p>
+            <a:pPr marL="0" indent="0" algn="just">
+              <a:buNone/>
+            </a:pPr>
+            <a:r>
+              <a:rPr lang="es-US" dirty="0"/>
+              <a:t>Seguridad y Cumplimiento: El uso de un </a:t>
+            </a:r>
+            <a:r>
+              <a:rPr lang="es-US" dirty="0" err="1"/>
+              <a:t>GestorSeguridad</a:t>
+            </a:r>
+            <a:r>
+              <a:rPr lang="es-US" dirty="0"/>
+              <a:t> permite aplicar políticas de cifrado a las plantillas biométricas y validar accesos administrativos, asegurando que la información sensible esté protegida bajo normas de seguridad de datos.</a:t>
+            </a:r>
+          </a:p>
+          <a:p>
+            <a:pPr marL="0" indent="0" algn="just">
+              <a:buNone/>
+            </a:pPr>
+            <a:r>
+              <a:rPr lang="es-US" dirty="0"/>
+              <a:t>Toma de Decisiones Informada: El Gestor de Reportes permite transformar los datos crudos en documentos PDF o Excel, facilitando el análisis de puntualidad y asistencia por parte de los directivos. </a:t>
+            </a:r>
+          </a:p>
+          <a:p>
+            <a:pPr marL="0" indent="0" algn="just">
+              <a:buNone/>
+            </a:pPr>
+            <a:endParaRPr lang="es-US" dirty="0"/>
+          </a:p>
+          <a:p>
+            <a:endParaRPr lang="es-US" dirty="0"/>
+          </a:p>
+        </p:txBody>
+      </p:sp>
+    </p:spTree>
+    <p:extLst>
+      <p:ext uri="{BB962C8B-B14F-4D97-AF65-F5344CB8AC3E}">
+        <p14:creationId xmlns:p14="http://schemas.microsoft.com/office/powerpoint/2010/main" val="2900904355"/>
+      </p:ext>
+    </p:extLst>
+  </p:cSld>
+  <p:clrMapOvr>
+    <a:masterClrMapping/>
+  </p:clrMapOvr>
+</p:sld>
+</file>
+
+<file path=ppt/slides/slide4.xml><?xml version="1.0" encoding="utf-8"?>
+<p:sld xmlns:a="http://schemas.openxmlformats.org/drawingml/2006/main" xmlns:r="http://schemas.openxmlformats.org/officeDocument/2006/relationships" xmlns:p="http://schemas.openxmlformats.org/presentationml/2006/main">
+  <p:cSld>
+    <p:spTree>
+      <p:nvGrpSpPr>
+        <p:cNvPr id="1" name=""/>
+        <p:cNvGrpSpPr/>
+        <p:nvPr/>
+      </p:nvGrpSpPr>
+      <p:grpSpPr>
+        <a:xfrm>
+          <a:off x="0" y="0"/>
+          <a:ext cx="0" cy="0"/>
+          <a:chOff x="0" y="0"/>
+          <a:chExt cx="0" cy="0"/>
+        </a:xfrm>
+      </p:grpSpPr>
+      <p:sp>
+        <p:nvSpPr>
           <p:cNvPr id="3" name="Marcador de contenido 2">
             <a:extLst>
               <a:ext uri="{FF2B5EF4-FFF2-40B4-BE49-F238E27FC236}">
@@ -6901,41 +7440,6 @@
           </a:prstGeom>
         </p:spPr>
       </p:pic>
-      <p:sp>
-        <p:nvSpPr>
-          <p:cNvPr id="2" name="CuadroTexto 1">
-            <a:extLst>
-              <a:ext uri="{FF2B5EF4-FFF2-40B4-BE49-F238E27FC236}">
-                <a16:creationId xmlns:a16="http://schemas.microsoft.com/office/drawing/2014/main" id="{F6FF9C05-555E-0F7F-0B71-8A0252CB4E9F}"/>
-              </a:ext>
-            </a:extLst>
-          </p:cNvPr>
-          <p:cNvSpPr txBox="1"/>
-          <p:nvPr/>
-        </p:nvSpPr>
-        <p:spPr>
-          <a:xfrm>
-            <a:off x="4982966" y="205483"/>
-            <a:ext cx="4417888" cy="646331"/>
-          </a:xfrm>
-          <a:prstGeom prst="rect">
-            <a:avLst/>
-          </a:prstGeom>
-          <a:noFill/>
-        </p:spPr>
-        <p:txBody>
-          <a:bodyPr wrap="square" rtlCol="0">
-            <a:spAutoFit/>
-          </a:bodyPr>
-          <a:lstStyle/>
-          <a:p>
-            <a:r>
-              <a:rPr lang="es-MX" dirty="0"/>
-              <a:t>Comenzamos con nuestro primer diagrama UML</a:t>
-            </a:r>
-          </a:p>
-        </p:txBody>
-      </p:sp>
     </p:spTree>
     <p:extLst>
       <p:ext uri="{BB962C8B-B14F-4D97-AF65-F5344CB8AC3E}">
@@ -6949,7 +7453,7 @@
 </p:sld>
 </file>
 
-<file path=ppt/slides/slide4.xml><?xml version="1.0" encoding="utf-8"?>
+<file path=ppt/slides/slide5.xml><?xml version="1.0" encoding="utf-8"?>
 <p:sld xmlns:a="http://schemas.openxmlformats.org/drawingml/2006/main" xmlns:r="http://schemas.openxmlformats.org/officeDocument/2006/relationships" xmlns:p="http://schemas.openxmlformats.org/presentationml/2006/main">
   <p:cSld>
     <p:spTree>
@@ -7075,7 +7579,7 @@
 </p:sld>
 </file>
 
-<file path=ppt/slides/slide5.xml><?xml version="1.0" encoding="utf-8"?>
+<file path=ppt/slides/slide6.xml><?xml version="1.0" encoding="utf-8"?>
 <p:sld xmlns:a="http://schemas.openxmlformats.org/drawingml/2006/main" xmlns:r="http://schemas.openxmlformats.org/officeDocument/2006/relationships" xmlns:p="http://schemas.openxmlformats.org/presentationml/2006/main">
   <p:cSld>
     <p:spTree>
@@ -7219,7 +7723,7 @@
 </p:sld>
 </file>
 
-<file path=ppt/slides/slide6.xml><?xml version="1.0" encoding="utf-8"?>
+<file path=ppt/slides/slide7.xml><?xml version="1.0" encoding="utf-8"?>
 <p:sld xmlns:a="http://schemas.openxmlformats.org/drawingml/2006/main" xmlns:r="http://schemas.openxmlformats.org/officeDocument/2006/relationships" xmlns:p="http://schemas.openxmlformats.org/presentationml/2006/main">
   <p:cSld>
     <p:spTree>
@@ -7306,93 +7810,6 @@
 </p:sld>
 </file>
 
-<file path=ppt/slides/slide7.xml><?xml version="1.0" encoding="utf-8"?>
-<p:sld xmlns:a="http://schemas.openxmlformats.org/drawingml/2006/main" xmlns:r="http://schemas.openxmlformats.org/officeDocument/2006/relationships" xmlns:p="http://schemas.openxmlformats.org/presentationml/2006/main">
-  <p:cSld>
-    <p:spTree>
-      <p:nvGrpSpPr>
-        <p:cNvPr id="1" name=""/>
-        <p:cNvGrpSpPr/>
-        <p:nvPr/>
-      </p:nvGrpSpPr>
-      <p:grpSpPr>
-        <a:xfrm>
-          <a:off x="0" y="0"/>
-          <a:ext cx="0" cy="0"/>
-          <a:chOff x="0" y="0"/>
-          <a:chExt cx="0" cy="0"/>
-        </a:xfrm>
-      </p:grpSpPr>
-      <p:sp>
-        <p:nvSpPr>
-          <p:cNvPr id="2" name="Título 1">
-            <a:extLst>
-              <a:ext uri="{FF2B5EF4-FFF2-40B4-BE49-F238E27FC236}">
-                <a16:creationId xmlns:a16="http://schemas.microsoft.com/office/drawing/2014/main" id="{F3DE34CD-9F2E-ADA7-F6F9-6EA0F920F8D9}"/>
-              </a:ext>
-            </a:extLst>
-          </p:cNvPr>
-          <p:cNvSpPr>
-            <a:spLocks noGrp="1"/>
-          </p:cNvSpPr>
-          <p:nvPr>
-            <p:ph type="title"/>
-          </p:nvPr>
-        </p:nvSpPr>
-        <p:spPr/>
-        <p:txBody>
-          <a:bodyPr/>
-          <a:lstStyle/>
-          <a:p>
-            <a:r>
-              <a:rPr lang="es-MX" dirty="0"/>
-              <a:t>Segundo diagrama</a:t>
-            </a:r>
-          </a:p>
-        </p:txBody>
-      </p:sp>
-      <p:pic>
-        <p:nvPicPr>
-          <p:cNvPr id="5" name="Marcador de contenido 4">
-            <a:extLst>
-              <a:ext uri="{FF2B5EF4-FFF2-40B4-BE49-F238E27FC236}">
-                <a16:creationId xmlns:a16="http://schemas.microsoft.com/office/drawing/2014/main" id="{2961B0EA-82DC-6F76-65E5-D692C375CC64}"/>
-              </a:ext>
-            </a:extLst>
-          </p:cNvPr>
-          <p:cNvPicPr>
-            <a:picLocks noGrp="1" noChangeAspect="1"/>
-          </p:cNvPicPr>
-          <p:nvPr>
-            <p:ph idx="1"/>
-          </p:nvPr>
-        </p:nvPicPr>
-        <p:blipFill>
-          <a:blip r:embed="rId2"/>
-          <a:stretch>
-            <a:fillRect/>
-          </a:stretch>
-        </p:blipFill>
-        <p:spPr>
-          <a:xfrm>
-            <a:off x="1017090" y="1270000"/>
-            <a:ext cx="4234431" cy="5144834"/>
-          </a:xfrm>
-        </p:spPr>
-      </p:pic>
-    </p:spTree>
-    <p:extLst>
-      <p:ext uri="{BB962C8B-B14F-4D97-AF65-F5344CB8AC3E}">
-        <p14:creationId xmlns:p14="http://schemas.microsoft.com/office/powerpoint/2010/main" val="1367906496"/>
-      </p:ext>
-    </p:extLst>
-  </p:cSld>
-  <p:clrMapOvr>
-    <a:masterClrMapping/>
-  </p:clrMapOvr>
-</p:sld>
-</file>
-
 <file path=ppt/slides/slide8.xml><?xml version="1.0" encoding="utf-8"?>
 <p:sld xmlns:a="http://schemas.openxmlformats.org/drawingml/2006/main" xmlns:r="http://schemas.openxmlformats.org/officeDocument/2006/relationships" xmlns:p="http://schemas.openxmlformats.org/presentationml/2006/main">
   <p:cSld>
@@ -7412,10 +7829,10 @@
       </p:grpSpPr>
       <p:sp>
         <p:nvSpPr>
-          <p:cNvPr id="2" name="Título 1">
+          <p:cNvPr id="5" name="Marcador de contenido 2">
             <a:extLst>
               <a:ext uri="{FF2B5EF4-FFF2-40B4-BE49-F238E27FC236}">
-                <a16:creationId xmlns:a16="http://schemas.microsoft.com/office/drawing/2014/main" id="{7105D634-59E8-381C-A5B7-D8F71D659552}"/>
+                <a16:creationId xmlns:a16="http://schemas.microsoft.com/office/drawing/2014/main" id="{EB1B3451-1200-D031-E0C9-FC663DCF76CC}"/>
               </a:ext>
             </a:extLst>
           </p:cNvPr>
@@ -7423,56 +7840,75 @@
             <a:spLocks noGrp="1"/>
           </p:cNvSpPr>
           <p:nvPr>
-            <p:ph type="title"/>
-          </p:nvPr>
-        </p:nvSpPr>
-        <p:spPr/>
-        <p:txBody>
-          <a:bodyPr/>
+            <p:ph idx="1"/>
+          </p:nvPr>
+        </p:nvSpPr>
+        <p:spPr>
+          <a:xfrm>
+            <a:off x="641810" y="251148"/>
+            <a:ext cx="8596668" cy="3880773"/>
+          </a:xfrm>
+        </p:spPr>
+        <p:txBody>
+          <a:bodyPr>
+            <a:normAutofit/>
+          </a:bodyPr>
           <a:lstStyle/>
           <a:p>
-            <a:r>
-              <a:rPr lang="es-MX" dirty="0"/>
-              <a:t>Conclusión </a:t>
-            </a:r>
-          </a:p>
-        </p:txBody>
-      </p:sp>
-      <p:sp>
-        <p:nvSpPr>
-          <p:cNvPr id="3" name="Marcador de contenido 2">
+            <a:pPr marL="0" indent="0">
+              <a:buNone/>
+            </a:pPr>
+            <a:r>
+              <a:rPr lang="es-US" sz="2800" dirty="0">
+                <a:solidFill>
+                  <a:srgbClr val="92D050"/>
+                </a:solidFill>
+              </a:rPr>
+              <a:t>Diagrama de Casos de Uso (UML) </a:t>
+            </a:r>
+          </a:p>
+        </p:txBody>
+      </p:sp>
+      <p:pic>
+        <p:nvPicPr>
+          <p:cNvPr id="7" name="Imagen 6">
             <a:extLst>
               <a:ext uri="{FF2B5EF4-FFF2-40B4-BE49-F238E27FC236}">
-                <a16:creationId xmlns:a16="http://schemas.microsoft.com/office/drawing/2014/main" id="{60DE4E72-0024-C1BC-C0FC-5DA68682D8C8}"/>
+                <a16:creationId xmlns:a16="http://schemas.microsoft.com/office/drawing/2014/main" id="{BF1023B7-869D-9B20-A9A5-A3441E5D4990}"/>
               </a:ext>
             </a:extLst>
           </p:cNvPr>
-          <p:cNvSpPr>
-            <a:spLocks noGrp="1"/>
-          </p:cNvSpPr>
-          <p:nvPr>
-            <p:ph idx="1"/>
-          </p:nvPr>
-        </p:nvSpPr>
-        <p:spPr/>
-        <p:txBody>
-          <a:bodyPr/>
-          <a:lstStyle/>
-          <a:p>
-            <a:pPr marL="0" indent="0" algn="just">
-              <a:buNone/>
-            </a:pPr>
-            <a:r>
-              <a:rPr lang="es-MX" dirty="0"/>
-              <a:t>El diagrama UML permite entender de forma clara la organización y funcionamiento del sistema biométrico de asistencia. Gracias a la separación de responsabilidades por clases y sus relaciones, se obtiene un diseño ordenado, seguro y fácil de implementar, que cubre autenticación, registro y gestión de información.</a:t>
-            </a:r>
-          </a:p>
-        </p:txBody>
-      </p:sp>
+          <p:cNvPicPr>
+            <a:picLocks noChangeAspect="1"/>
+          </p:cNvPicPr>
+          <p:nvPr/>
+        </p:nvPicPr>
+        <p:blipFill>
+          <a:blip r:embed="rId2">
+            <a:extLst>
+              <a:ext uri="{28A0092B-C50C-407E-A947-70E740481C1C}">
+                <a14:useLocalDpi xmlns:a14="http://schemas.microsoft.com/office/drawing/2010/main" val="0"/>
+              </a:ext>
+            </a:extLst>
+          </a:blip>
+          <a:stretch>
+            <a:fillRect/>
+          </a:stretch>
+        </p:blipFill>
+        <p:spPr>
+          <a:xfrm>
+            <a:off x="2564900" y="977218"/>
+            <a:ext cx="4750487" cy="5418667"/>
+          </a:xfrm>
+          <a:prstGeom prst="rect">
+            <a:avLst/>
+          </a:prstGeom>
+        </p:spPr>
+      </p:pic>
     </p:spTree>
     <p:extLst>
       <p:ext uri="{BB962C8B-B14F-4D97-AF65-F5344CB8AC3E}">
-        <p14:creationId xmlns:p14="http://schemas.microsoft.com/office/powerpoint/2010/main" val="1523644883"/>
+        <p14:creationId xmlns:p14="http://schemas.microsoft.com/office/powerpoint/2010/main" val="2089040943"/>
       </p:ext>
     </p:extLst>
   </p:cSld>
@@ -7504,7 +7940,7 @@
           <p:cNvPr id="2" name="Título 1">
             <a:extLst>
               <a:ext uri="{FF2B5EF4-FFF2-40B4-BE49-F238E27FC236}">
-                <a16:creationId xmlns:a16="http://schemas.microsoft.com/office/drawing/2014/main" id="{775EB4DD-C0CC-879D-B612-695F499DF281}"/>
+                <a16:creationId xmlns:a16="http://schemas.microsoft.com/office/drawing/2014/main" id="{7105D634-59E8-381C-A5B7-D8F71D659552}"/>
               </a:ext>
             </a:extLst>
           </p:cNvPr>
@@ -7522,7 +7958,7 @@
           <a:p>
             <a:r>
               <a:rPr lang="es-MX" dirty="0"/>
-              <a:t>Anexo link de la actividad solicitada y subida a GitHub:</a:t>
+              <a:t>Conclusión </a:t>
             </a:r>
           </a:p>
         </p:txBody>
@@ -7532,7 +7968,7 @@
           <p:cNvPr id="3" name="Marcador de contenido 2">
             <a:extLst>
               <a:ext uri="{FF2B5EF4-FFF2-40B4-BE49-F238E27FC236}">
-                <a16:creationId xmlns:a16="http://schemas.microsoft.com/office/drawing/2014/main" id="{ED2570EF-8418-9140-DCEC-E40310D403D1}"/>
+                <a16:creationId xmlns:a16="http://schemas.microsoft.com/office/drawing/2014/main" id="{60DE4E72-0024-C1BC-C0FC-5DA68682D8C8}"/>
               </a:ext>
             </a:extLst>
           </p:cNvPr>
@@ -7545,22 +7981,24 @@
         </p:nvSpPr>
         <p:spPr>
           <a:xfrm>
-            <a:off x="677334" y="2160589"/>
-            <a:ext cx="8596668" cy="962755"/>
+            <a:off x="677334" y="1469612"/>
+            <a:ext cx="8596668" cy="3918775"/>
           </a:xfrm>
         </p:spPr>
         <p:txBody>
           <a:bodyPr/>
           <a:lstStyle/>
           <a:p>
-            <a:pPr marL="0" indent="0">
+            <a:pPr marL="0" indent="0" algn="just">
               <a:buNone/>
             </a:pPr>
             <a:r>
-              <a:rPr lang="es-MX" dirty="0">
-                <a:hlinkClick r:id="rId2"/>
-              </a:rPr>
-              <a:t>https://github.com/Cynthia21Morales/Ingenieria_del_Software_CynthiaJasmineMT/blob/main/unidad%201/1.3%20Ejercicio%20Diagrama%20Uml_Cynthia%20Jasmine%20Morales%20Torres.pptx</a:t>
+              <a:rPr lang="es-MX" dirty="0"/>
+              <a:t>El diagrama UML permite entender de forma clara la organización y funcionamiento del sistema biométrico de asistencia. Gracias a la separación de responsabilidades por clases y sus relaciones, se obtiene un diseño ordenado, seguro y fácil de implementar, que cubre autenticación, registro y gestión de información</a:t>
+            </a:r>
+            <a:r>
+              <a:rPr lang="es-US" dirty="0"/>
+              <a:t>. ​El diseño del sistema de control biométrico demuestra una estructura robusta y escalable bajo el paradigma de orientación a objetos. La integración de clases especializadas permite no solo el registro eficiente de la jornada laboral de los catedráticos, sino también una gestión administrativa centralizada y segura.  La información de los usuarios y su biometría en una base de datos estructurada. Esta solución tecnológica representa un avance significativo en la eficiencia operativa y la seguridad institucional, cumpliendo con los requerimientos técnicos y funcionales descritos en los diagramas de casos de uso y clases.  </a:t>
             </a:r>
             <a:endParaRPr lang="es-MX" dirty="0"/>
           </a:p>
@@ -7569,7 +8007,7 @@
     </p:spTree>
     <p:extLst>
       <p:ext uri="{BB962C8B-B14F-4D97-AF65-F5344CB8AC3E}">
-        <p14:creationId xmlns:p14="http://schemas.microsoft.com/office/powerpoint/2010/main" val="964952945"/>
+        <p14:creationId xmlns:p14="http://schemas.microsoft.com/office/powerpoint/2010/main" val="1523644883"/>
       </p:ext>
     </p:extLst>
   </p:cSld>

--- a/unidad 1/1.3 Ejercicio Diagrama Uml_Cynthia Jasmine Morales Torres.pptx
+++ b/unidad 1/1.3 Ejercicio Diagrama Uml_Cynthia Jasmine Morales Torres.pptx
@@ -7046,6 +7046,12 @@
             <a:pPr marL="0" indent="0">
               <a:buNone/>
             </a:pPr>
+            <a:r>
+              <a:rPr lang="es-MX" dirty="0">
+                <a:hlinkClick r:id="rId2"/>
+              </a:rPr>
+              <a:t>https://github.com/Cynthia21Morales/Ingenieria_del_Software_CynthiaJasmineMT/blob/main/unidad%201/1.3%20Ejercicio%20Diagrama%20Uml_Cynthia%20Jasmine%20Morales%20Torres.pptx</a:t>
+            </a:r>
             <a:endParaRPr lang="es-MX" dirty="0"/>
           </a:p>
         </p:txBody>
